--- a/Y9_Exploring_Science/9C_Threat_from_disease/9C_L03_Control_systems_nerves_and_hormones.pptx
+++ b/Y9_Exploring_Science/9C_Threat_from_disease/9C_L03_Control_systems_nerves_and_hormones.pptx
@@ -1740,7 +1740,7 @@
         <p:spPr>
           <a:xfrm>
             <a:off x="548640" y="3657600"/>
-            <a:ext cx="10515600" cy="914400"/>
+            <a:ext cx="10515600" cy="1097280"/>
           </a:xfrm>
           <a:prstGeom prst="rect">
             <a:avLst/>
@@ -1753,7 +1753,7 @@
           <a:lstStyle>
             <a:lvl1pPr indent="0" marL="0">
               <a:buNone/>
-              <a:defRPr lang="en-US" sz="2000" dirty="0">
+              <a:defRPr lang="en-US" sz="2400" dirty="0">
                 <a:solidFill>
                   <a:srgbClr val="FFFFFF"/>
                 </a:solidFill>
@@ -1764,7 +1764,7 @@
             <a:pPr indent="0" marL="0">
               <a:buNone/>
             </a:pPr>
-            <a:endParaRPr lang="en-US" sz="2000" dirty="0"/>
+            <a:endParaRPr lang="en-US" sz="2400" dirty="0"/>
           </a:p>
         </p:txBody>
       </p:sp>
@@ -1864,14 +1864,14 @@
               <a:buNone/>
             </a:pPr>
             <a:r>
-              <a:rPr lang="en-US" sz="900" dirty="0">
+              <a:rPr lang="en-US" sz="1000" dirty="0">
                 <a:solidFill>
                   <a:srgbClr val="5B6574"/>
                 </a:solidFill>
               </a:rPr>
               <a:t>Year 9 Science  |  9C Threat from disease  |  Lesson 3: Control systems: nerves and hormones</a:t>
             </a:r>
-            <a:endParaRPr lang="en-US" sz="900" dirty="0"/>
+            <a:endParaRPr lang="en-US" sz="1000" dirty="0"/>
           </a:p>
         </p:txBody>
       </p:sp>
@@ -2040,14 +2040,14 @@
               <a:buNone/>
             </a:pPr>
             <a:r>
-              <a:rPr lang="en-US" sz="900" dirty="0">
+              <a:rPr lang="en-US" sz="1000" dirty="0">
                 <a:solidFill>
                   <a:srgbClr val="5B6574"/>
                 </a:solidFill>
               </a:rPr>
               <a:t>Year 9 Science  |  9C Threat from disease  |  Lesson 3: Control systems: nerves and hormones</a:t>
             </a:r>
-            <a:endParaRPr lang="en-US" sz="900" dirty="0"/>
+            <a:endParaRPr lang="en-US" sz="1000" dirty="0"/>
           </a:p>
         </p:txBody>
       </p:sp>
@@ -2216,14 +2216,14 @@
               <a:buNone/>
             </a:pPr>
             <a:r>
-              <a:rPr lang="en-US" sz="900" dirty="0">
+              <a:rPr lang="en-US" sz="1000" dirty="0">
                 <a:solidFill>
                   <a:srgbClr val="5B6574"/>
                 </a:solidFill>
               </a:rPr>
               <a:t>Year 9 Science  |  9C Threat from disease  |  Lesson 3: Control systems: nerves and hormones</a:t>
             </a:r>
-            <a:endParaRPr lang="en-US" sz="900" dirty="0"/>
+            <a:endParaRPr lang="en-US" sz="1000" dirty="0"/>
           </a:p>
         </p:txBody>
       </p:sp>
@@ -2352,7 +2352,7 @@
           <a:lstStyle>
             <a:lvl1pPr indent="0" marL="0">
               <a:buNone/>
-              <a:defRPr lang="en-US" sz="3000" b="1" dirty="0">
+              <a:defRPr lang="en-US" sz="3400" b="1" dirty="0">
                 <a:solidFill>
                   <a:srgbClr val="3A2E00"/>
                 </a:solidFill>
@@ -2363,7 +2363,7 @@
             <a:pPr indent="0" marL="0">
               <a:buNone/>
             </a:pPr>
-            <a:endParaRPr lang="en-US" sz="3000" dirty="0"/>
+            <a:endParaRPr lang="en-US" sz="3400" dirty="0"/>
           </a:p>
         </p:txBody>
       </p:sp>
@@ -2780,14 +2780,14 @@
               <a:buNone/>
             </a:pPr>
             <a:r>
-              <a:rPr lang="en-US" sz="1300" b="1" spc="200" kern="0" dirty="0">
+              <a:rPr lang="en-US" sz="1400" b="1" spc="200" kern="0" dirty="0">
                 <a:solidFill>
                   <a:srgbClr val="F2CE3E"/>
                 </a:solidFill>
               </a:rPr>
               <a:t>YEAR 9 SCIENCE  ·  9C THREAT FROM DISEASE  ·  LESSON 3 OF 7</a:t>
             </a:r>
-            <a:endParaRPr lang="en-US" sz="1300" dirty="0"/>
+            <a:endParaRPr lang="en-US" sz="1400" dirty="0"/>
           </a:p>
         </p:txBody>
       </p:sp>
@@ -2840,7 +2840,7 @@
         <p:spPr>
           <a:xfrm>
             <a:off x="548640" y="3657600"/>
-            <a:ext cx="10515600" cy="914400"/>
+            <a:ext cx="10515600" cy="1097280"/>
           </a:xfrm>
           <a:prstGeom prst="rect">
             <a:avLst/>
@@ -2856,14 +2856,14 @@
               <a:buNone/>
             </a:pPr>
             <a:r>
-              <a:rPr lang="en-US" sz="2000" dirty="0">
+              <a:rPr lang="en-US" sz="2400" dirty="0">
                 <a:solidFill>
                   <a:srgbClr val="FFFFFF"/>
                 </a:solidFill>
               </a:rPr>
               <a:t>How does your body know what is happening around it, and how does it respond?</a:t>
             </a:r>
-            <a:endParaRPr lang="en-US" sz="2000" dirty="0"/>
+            <a:endParaRPr lang="en-US" sz="2400" dirty="0"/>
           </a:p>
         </p:txBody>
       </p:sp>
@@ -2892,14 +2892,14 @@
               <a:buNone/>
             </a:pPr>
             <a:r>
-              <a:rPr lang="en-US" sz="1200" dirty="0">
+              <a:rPr lang="en-US" sz="1400" dirty="0">
                 <a:solidFill>
                   <a:srgbClr val="C9D3E6"/>
                 </a:solidFill>
               </a:rPr>
               <a:t>Exploring Science International 9  ·  Student Book pages 42 to 43  ·  Workbook pages 31</a:t>
             </a:r>
-            <a:endParaRPr lang="en-US" sz="1200" dirty="0"/>
+            <a:endParaRPr lang="en-US" sz="1400" dirty="0"/>
           </a:p>
         </p:txBody>
       </p:sp>
@@ -3054,7 +3054,7 @@
               <a:buNone/>
             </a:pPr>
             <a:r>
-              <a:rPr lang="en-US" sz="1500" b="1" dirty="0">
+              <a:rPr lang="en-US" sz="1800" b="1" dirty="0">
                 <a:solidFill>
                   <a:srgbClr val="7B3A8E"/>
                 </a:solidFill>
@@ -3065,14 +3065,14 @@
               <a:buNone/>
             </a:pPr>
             <a:r>
-              <a:rPr lang="en-US" sz="1500" dirty="0">
+              <a:rPr lang="en-US" sz="1800" dirty="0">
                 <a:solidFill>
                   <a:srgbClr val="141B26"/>
                 </a:solidFill>
               </a:rPr>
               <a:t>Measure how quickly your nervous system responds to a stimulus.</a:t>
             </a:r>
-            <a:endParaRPr lang="en-US" sz="1500" dirty="0"/>
+            <a:endParaRPr lang="en-US" sz="1800" dirty="0"/>
           </a:p>
         </p:txBody>
       </p:sp>
@@ -3101,14 +3101,14 @@
               <a:buNone/>
             </a:pPr>
             <a:r>
-              <a:rPr lang="en-US" sz="1600" b="1" dirty="0">
+              <a:rPr lang="en-US" sz="1800" b="1" dirty="0">
                 <a:solidFill>
                   <a:srgbClr val="0F2A5F"/>
                 </a:solidFill>
               </a:rPr>
               <a:t>Equipment</a:t>
             </a:r>
-            <a:endParaRPr lang="en-US" sz="1600" dirty="0"/>
+            <a:endParaRPr lang="en-US" sz="1800" dirty="0"/>
           </a:p>
         </p:txBody>
       </p:sp>
@@ -3130,237 +3130,233 @@
           <a:ln/>
         </p:spPr>
         <p:txBody>
-          <a:bodyPr wrap="square" lIns="0" tIns="0" rIns="0" bIns="0" rtlCol="0" anchor="t">
-            <a:normAutofit/>
-          </a:bodyPr>
-          <a:lstStyle/>
-          <a:p>
-            <a:pPr marL="228600" indent="-228600">
+          <a:bodyPr wrap="square" lIns="0" tIns="0" rIns="0" bIns="0" rtlCol="0" anchor="t"/>
+          <a:lstStyle/>
+          <a:p>
+            <a:pPr marL="304800" indent="-304800">
+              <a:spcAft>
+                <a:spcPts val="800"/>
+              </a:spcAft>
+              <a:buSzPct val="100000"/>
+              <a:buChar char="•"/>
+            </a:pPr>
+            <a:r>
+              <a:rPr lang="en-US" sz="1600" dirty="0">
+                <a:solidFill>
+                  <a:srgbClr val="141B26"/>
+                </a:solidFill>
+              </a:rPr>
+              <a:t>30 cm ruler</a:t>
+            </a:r>
+            <a:endParaRPr lang="en-US" sz="1600" dirty="0"/>
+          </a:p>
+          <a:p>
+            <a:pPr marL="304800" indent="-304800">
+              <a:spcAft>
+                <a:spcPts val="800"/>
+              </a:spcAft>
+              <a:buSzPct val="100000"/>
+              <a:buChar char="•"/>
+            </a:pPr>
+            <a:r>
+              <a:rPr lang="en-US" sz="1600" dirty="0">
+                <a:solidFill>
+                  <a:srgbClr val="141B26"/>
+                </a:solidFill>
+              </a:rPr>
+              <a:t>a partner</a:t>
+            </a:r>
+            <a:endParaRPr lang="en-US" sz="1600" dirty="0"/>
+          </a:p>
+          <a:p>
+            <a:pPr marL="304800" indent="-304800">
+              <a:spcAft>
+                <a:spcPts val="800"/>
+              </a:spcAft>
+              <a:buSzPct val="100000"/>
+              <a:buChar char="•"/>
+            </a:pPr>
+            <a:r>
+              <a:rPr lang="en-US" sz="1600" dirty="0">
+                <a:solidFill>
+                  <a:srgbClr val="141B26"/>
+                </a:solidFill>
+              </a:rPr>
+              <a:t>the results table on your worksheet (Core 3)</a:t>
+            </a:r>
+            <a:endParaRPr lang="en-US" sz="1600" dirty="0"/>
+          </a:p>
+        </p:txBody>
+      </p:sp>
+      <p:sp>
+        <p:nvSpPr>
+          <p:cNvPr id="8" name="Text 6"/>
+          <p:cNvSpPr txBox="1"/>
+          <p:nvPr/>
+        </p:nvSpPr>
+        <p:spPr>
+          <a:xfrm>
+            <a:off x="4937760" y="1828800"/>
+            <a:ext cx="6675120" cy="365760"/>
+          </a:xfrm>
+          <a:prstGeom prst="rect">
+            <a:avLst/>
+          </a:prstGeom>
+          <a:noFill/>
+          <a:ln/>
+        </p:spPr>
+        <p:txBody>
+          <a:bodyPr wrap="square" lIns="0" tIns="0" rIns="0" bIns="0" rtlCol="0" anchor="ctr"/>
+          <a:lstStyle/>
+          <a:p>
+            <a:pPr indent="0" marL="0">
+              <a:buNone/>
+            </a:pPr>
+            <a:r>
+              <a:rPr lang="en-US" sz="1800" b="1" dirty="0">
+                <a:solidFill>
+                  <a:srgbClr val="0F2A5F"/>
+                </a:solidFill>
+              </a:rPr>
+              <a:t>Method</a:t>
+            </a:r>
+            <a:endParaRPr lang="en-US" sz="1800" dirty="0"/>
+          </a:p>
+        </p:txBody>
+      </p:sp>
+      <p:sp>
+        <p:nvSpPr>
+          <p:cNvPr id="9" name="Text 7"/>
+          <p:cNvSpPr txBox="1"/>
+          <p:nvPr/>
+        </p:nvSpPr>
+        <p:spPr>
+          <a:xfrm>
+            <a:off x="4937760" y="2240280"/>
+            <a:ext cx="6675120" cy="3200400"/>
+          </a:xfrm>
+          <a:prstGeom prst="rect">
+            <a:avLst/>
+          </a:prstGeom>
+          <a:noFill/>
+          <a:ln/>
+        </p:spPr>
+        <p:txBody>
+          <a:bodyPr wrap="square" lIns="0" tIns="0" rIns="0" bIns="0" rtlCol="0" anchor="t"/>
+          <a:lstStyle/>
+          <a:p>
+            <a:pPr marL="342900" indent="-342900">
               <a:spcAft>
                 <a:spcPts val="600"/>
               </a:spcAft>
               <a:buSzPct val="100000"/>
-              <a:buChar char="•"/>
-            </a:pPr>
-            <a:r>
-              <a:rPr lang="en-US" sz="1300" dirty="0">
+              <a:buFont typeface="+mj-lt"/>
+              <a:buAutoNum type="arabicPeriod" startAt="1"/>
+            </a:pPr>
+            <a:r>
+              <a:rPr lang="en-US" sz="1500" dirty="0">
                 <a:solidFill>
                   <a:srgbClr val="141B26"/>
                 </a:solidFill>
               </a:rPr>
-              <a:t>30 cm ruler</a:t>
-            </a:r>
-            <a:endParaRPr lang="en-US" sz="1300" dirty="0"/>
-          </a:p>
-          <a:p>
-            <a:pPr marL="228600" indent="-228600">
+              <a:t>Rest your forearm on the desk with your hand over the edge, thumb and finger open about 3 cm apart.</a:t>
+            </a:r>
+            <a:endParaRPr lang="en-US" sz="1500" dirty="0"/>
+          </a:p>
+          <a:p>
+            <a:pPr marL="342900" indent="-342900">
               <a:spcAft>
                 <a:spcPts val="600"/>
               </a:spcAft>
               <a:buSzPct val="100000"/>
-              <a:buChar char="•"/>
-            </a:pPr>
-            <a:r>
-              <a:rPr lang="en-US" sz="1300" dirty="0">
+              <a:buFont typeface="+mj-lt"/>
+              <a:buAutoNum type="arabicPeriod" startAt="1"/>
+            </a:pPr>
+            <a:r>
+              <a:rPr lang="en-US" sz="1500" dirty="0">
                 <a:solidFill>
                   <a:srgbClr val="141B26"/>
                 </a:solidFill>
               </a:rPr>
-              <a:t>a partner</a:t>
-            </a:r>
-            <a:endParaRPr lang="en-US" sz="1300" dirty="0"/>
-          </a:p>
-          <a:p>
-            <a:pPr marL="228600" indent="-228600">
+              <a:t>Your partner holds the ruler so the 0 cm mark is level with the top of your thumb.</a:t>
+            </a:r>
+            <a:endParaRPr lang="en-US" sz="1500" dirty="0"/>
+          </a:p>
+          <a:p>
+            <a:pPr marL="342900" indent="-342900">
               <a:spcAft>
                 <a:spcPts val="600"/>
               </a:spcAft>
               <a:buSzPct val="100000"/>
-              <a:buChar char="•"/>
-            </a:pPr>
-            <a:r>
-              <a:rPr lang="en-US" sz="1300" dirty="0">
+              <a:buFont typeface="+mj-lt"/>
+              <a:buAutoNum type="arabicPeriod" startAt="1"/>
+            </a:pPr>
+            <a:r>
+              <a:rPr lang="en-US" sz="1500" dirty="0">
                 <a:solidFill>
                   <a:srgbClr val="141B26"/>
                 </a:solidFill>
               </a:rPr>
-              <a:t>the results table on your worksheet (Core 3)</a:t>
-            </a:r>
-            <a:endParaRPr lang="en-US" sz="1300" dirty="0"/>
-          </a:p>
-        </p:txBody>
-      </p:sp>
-      <p:sp>
-        <p:nvSpPr>
-          <p:cNvPr id="8" name="Text 6"/>
-          <p:cNvSpPr txBox="1"/>
-          <p:nvPr/>
-        </p:nvSpPr>
-        <p:spPr>
-          <a:xfrm>
-            <a:off x="4937760" y="1828800"/>
-            <a:ext cx="6675120" cy="365760"/>
-          </a:xfrm>
-          <a:prstGeom prst="rect">
-            <a:avLst/>
-          </a:prstGeom>
-          <a:noFill/>
-          <a:ln/>
-        </p:spPr>
-        <p:txBody>
-          <a:bodyPr wrap="square" lIns="0" tIns="0" rIns="0" bIns="0" rtlCol="0" anchor="ctr"/>
-          <a:lstStyle/>
-          <a:p>
-            <a:pPr indent="0" marL="0">
-              <a:buNone/>
-            </a:pPr>
-            <a:r>
-              <a:rPr lang="en-US" sz="1600" b="1" dirty="0">
-                <a:solidFill>
-                  <a:srgbClr val="0F2A5F"/>
-                </a:solidFill>
-              </a:rPr>
-              <a:t>Method</a:t>
-            </a:r>
-            <a:endParaRPr lang="en-US" sz="1600" dirty="0"/>
-          </a:p>
-        </p:txBody>
-      </p:sp>
-      <p:sp>
-        <p:nvSpPr>
-          <p:cNvPr id="9" name="Text 7"/>
-          <p:cNvSpPr txBox="1"/>
-          <p:nvPr/>
-        </p:nvSpPr>
-        <p:spPr>
-          <a:xfrm>
-            <a:off x="4937760" y="2240280"/>
-            <a:ext cx="6675120" cy="3200400"/>
-          </a:xfrm>
-          <a:prstGeom prst="rect">
-            <a:avLst/>
-          </a:prstGeom>
-          <a:noFill/>
-          <a:ln/>
-        </p:spPr>
-        <p:txBody>
-          <a:bodyPr wrap="square" lIns="0" tIns="0" rIns="0" bIns="0" rtlCol="0" anchor="t">
-            <a:normAutofit/>
-          </a:bodyPr>
-          <a:lstStyle/>
+              <a:t>Without warning, your partner lets go. Catch the ruler as fast as you can.</a:t>
+            </a:r>
+            <a:endParaRPr lang="en-US" sz="1500" dirty="0"/>
+          </a:p>
           <a:p>
             <a:pPr marL="342900" indent="-342900">
               <a:spcAft>
-                <a:spcPts val="500"/>
+                <a:spcPts val="600"/>
               </a:spcAft>
               <a:buSzPct val="100000"/>
               <a:buFont typeface="+mj-lt"/>
               <a:buAutoNum type="arabicPeriod" startAt="1"/>
             </a:pPr>
             <a:r>
-              <a:rPr lang="en-US" sz="1300" dirty="0">
+              <a:rPr lang="en-US" sz="1500" dirty="0">
                 <a:solidFill>
                   <a:srgbClr val="141B26"/>
                 </a:solidFill>
               </a:rPr>
-              <a:t>Rest your forearm on the desk with your hand over the edge, thumb and finger open about 3 cm apart.</a:t>
-            </a:r>
-            <a:endParaRPr lang="en-US" sz="1300" dirty="0"/>
+              <a:t>Read the distance (cm) at the top of your thumb and record it.</a:t>
+            </a:r>
+            <a:endParaRPr lang="en-US" sz="1500" dirty="0"/>
           </a:p>
           <a:p>
             <a:pPr marL="342900" indent="-342900">
               <a:spcAft>
-                <a:spcPts val="500"/>
+                <a:spcPts val="600"/>
               </a:spcAft>
               <a:buSzPct val="100000"/>
               <a:buFont typeface="+mj-lt"/>
               <a:buAutoNum type="arabicPeriod" startAt="1"/>
             </a:pPr>
             <a:r>
-              <a:rPr lang="en-US" sz="1300" dirty="0">
+              <a:rPr lang="en-US" sz="1500" dirty="0">
                 <a:solidFill>
                   <a:srgbClr val="141B26"/>
                 </a:solidFill>
               </a:rPr>
-              <a:t>Your partner holds the ruler so the 0 cm mark is level with the top of your thumb.</a:t>
-            </a:r>
-            <a:endParaRPr lang="en-US" sz="1300" dirty="0"/>
+              <a:t>Repeat five times, then calculate the mean. Swap over.</a:t>
+            </a:r>
+            <a:endParaRPr lang="en-US" sz="1500" dirty="0"/>
           </a:p>
           <a:p>
             <a:pPr marL="342900" indent="-342900">
               <a:spcAft>
-                <a:spcPts val="500"/>
+                <a:spcPts val="600"/>
               </a:spcAft>
               <a:buSzPct val="100000"/>
               <a:buFont typeface="+mj-lt"/>
               <a:buAutoNum type="arabicPeriod" startAt="1"/>
             </a:pPr>
             <a:r>
-              <a:rPr lang="en-US" sz="1300" dirty="0">
+              <a:rPr lang="en-US" sz="1500" dirty="0">
                 <a:solidFill>
                   <a:srgbClr val="141B26"/>
                 </a:solidFill>
               </a:rPr>
-              <a:t>Without warning, your partner lets go. Catch the ruler as fast as you can.</a:t>
-            </a:r>
-            <a:endParaRPr lang="en-US" sz="1300" dirty="0"/>
-          </a:p>
-          <a:p>
-            <a:pPr marL="342900" indent="-342900">
-              <a:spcAft>
-                <a:spcPts val="500"/>
-              </a:spcAft>
-              <a:buSzPct val="100000"/>
-              <a:buFont typeface="+mj-lt"/>
-              <a:buAutoNum type="arabicPeriod" startAt="1"/>
-            </a:pPr>
-            <a:r>
-              <a:rPr lang="en-US" sz="1300" dirty="0">
-                <a:solidFill>
-                  <a:srgbClr val="141B26"/>
-                </a:solidFill>
-              </a:rPr>
-              <a:t>Read the distance (cm) at the top of your thumb and record it.</a:t>
-            </a:r>
-            <a:endParaRPr lang="en-US" sz="1300" dirty="0"/>
-          </a:p>
-          <a:p>
-            <a:pPr marL="342900" indent="-342900">
-              <a:spcAft>
-                <a:spcPts val="500"/>
-              </a:spcAft>
-              <a:buSzPct val="100000"/>
-              <a:buFont typeface="+mj-lt"/>
-              <a:buAutoNum type="arabicPeriod" startAt="1"/>
-            </a:pPr>
-            <a:r>
-              <a:rPr lang="en-US" sz="1300" dirty="0">
-                <a:solidFill>
-                  <a:srgbClr val="141B26"/>
-                </a:solidFill>
-              </a:rPr>
-              <a:t>Repeat five times, then calculate the mean. Swap over.</a:t>
-            </a:r>
-            <a:endParaRPr lang="en-US" sz="1300" dirty="0"/>
-          </a:p>
-          <a:p>
-            <a:pPr marL="342900" indent="-342900">
-              <a:spcAft>
-                <a:spcPts val="500"/>
-              </a:spcAft>
-              <a:buSzPct val="100000"/>
-              <a:buFont typeface="+mj-lt"/>
-              <a:buAutoNum type="arabicPeriod" startAt="1"/>
-            </a:pPr>
-            <a:r>
-              <a:rPr lang="en-US" sz="1300" dirty="0">
-                <a:solidFill>
-                  <a:srgbClr val="141B26"/>
-                </a:solidFill>
-              </a:rPr>
               <a:t>Which part of the pathway was the receptor, the CNS and the effector?</a:t>
             </a:r>
-            <a:endParaRPr lang="en-US" sz="1300" dirty="0"/>
+            <a:endParaRPr lang="en-US" sz="1500" dirty="0"/>
           </a:p>
         </p:txBody>
       </p:sp>
@@ -3407,16 +3403,14 @@
           <a:ln/>
         </p:spPr>
         <p:txBody>
-          <a:bodyPr wrap="square" lIns="0" tIns="0" rIns="0" bIns="0" rtlCol="0" anchor="ctr">
-            <a:normAutofit/>
-          </a:bodyPr>
+          <a:bodyPr wrap="square" lIns="0" tIns="0" rIns="0" bIns="0" rtlCol="0" anchor="ctr"/>
           <a:lstStyle/>
           <a:p>
             <a:pPr indent="0" marL="0">
               <a:buNone/>
             </a:pPr>
             <a:r>
-              <a:rPr lang="en-US" sz="1300" b="1" dirty="0">
+              <a:rPr lang="en-US" sz="1500" b="1" dirty="0">
                 <a:solidFill>
                   <a:srgbClr val="3A2E00"/>
                 </a:solidFill>
@@ -3427,14 +3421,14 @@
               <a:buNone/>
             </a:pPr>
             <a:r>
-              <a:rPr lang="en-US" sz="1300" dirty="0">
+              <a:rPr lang="en-US" sz="1500" dirty="0">
                 <a:solidFill>
                   <a:srgbClr val="3A2E00"/>
                 </a:solidFill>
               </a:rPr>
               <a:t>Stay seated. Drop the ruler between the fingers, never throw it. Keep feet clear.</a:t>
             </a:r>
-            <a:endParaRPr lang="en-US" sz="1300" dirty="0"/>
+            <a:endParaRPr lang="en-US" sz="1500" dirty="0"/>
           </a:p>
         </p:txBody>
       </p:sp>
@@ -3627,23 +3621,21 @@
           <a:ln/>
         </p:spPr>
         <p:txBody>
-          <a:bodyPr wrap="square" lIns="0" tIns="0" rIns="0" bIns="0" rtlCol="0" anchor="t">
-            <a:normAutofit/>
-          </a:bodyPr>
+          <a:bodyPr wrap="square" lIns="0" tIns="0" rIns="0" bIns="0" rtlCol="0" anchor="t"/>
           <a:lstStyle/>
           <a:p>
             <a:pPr indent="0" marL="0">
               <a:buNone/>
             </a:pPr>
             <a:r>
-              <a:rPr lang="en-US" sz="2200" b="1" dirty="0">
+              <a:rPr lang="en-US" sz="2600" b="1" dirty="0">
                 <a:solidFill>
                   <a:srgbClr val="0F2A5F"/>
                 </a:solidFill>
               </a:rPr>
               <a:t>You tread on something sharp. Suggest which control system is better for responding to this stimulus, and explain why.</a:t>
             </a:r>
-            <a:endParaRPr lang="en-US" sz="2200" dirty="0"/>
+            <a:endParaRPr lang="en-US" sz="2600" dirty="0"/>
           </a:p>
         </p:txBody>
       </p:sp>
@@ -3692,9 +3684,7 @@
           <a:ln/>
         </p:spPr>
         <p:txBody>
-          <a:bodyPr wrap="square" lIns="0" tIns="0" rIns="0" bIns="0" rtlCol="0" anchor="t">
-            <a:normAutofit/>
-          </a:bodyPr>
+          <a:bodyPr wrap="square" lIns="0" tIns="0" rIns="0" bIns="0" rtlCol="0" anchor="t"/>
           <a:lstStyle/>
           <a:p>
             <a:pPr indent="0" marL="0">
@@ -3704,14 +3694,14 @@
               <a:buNone/>
             </a:pPr>
             <a:r>
-              <a:rPr lang="en-US" sz="1500" b="1" dirty="0">
+              <a:rPr lang="en-US" sz="1800" b="1" dirty="0">
                 <a:solidFill>
                   <a:srgbClr val="7B3A8E"/>
                 </a:solidFill>
               </a:rPr>
               <a:t>Sentence frames</a:t>
             </a:r>
-            <a:endParaRPr lang="en-US" sz="1500" dirty="0"/>
+            <a:endParaRPr lang="en-US" sz="1800" dirty="0"/>
           </a:p>
           <a:p>
             <a:pPr indent="0" marL="0">
@@ -3721,14 +3711,14 @@
               <a:buNone/>
             </a:pPr>
             <a:r>
-              <a:rPr lang="en-US" sz="1500" dirty="0">
+              <a:rPr lang="en-US" sz="1800" dirty="0">
                 <a:solidFill>
                   <a:srgbClr val="141B26"/>
                 </a:solidFill>
               </a:rPr>
               <a:t>The ___ system is better because the response needs to be ___.</a:t>
             </a:r>
-            <a:endParaRPr lang="en-US" sz="1500" dirty="0"/>
+            <a:endParaRPr lang="en-US" sz="1800" dirty="0"/>
           </a:p>
           <a:p>
             <a:pPr indent="0" marL="0">
@@ -3738,14 +3728,14 @@
               <a:buNone/>
             </a:pPr>
             <a:r>
-              <a:rPr lang="en-US" sz="1500" dirty="0">
+              <a:rPr lang="en-US" sz="1800" dirty="0">
                 <a:solidFill>
                   <a:srgbClr val="141B26"/>
                 </a:solidFill>
               </a:rPr>
               <a:t>The receptors in the ___ send impulses along ___ to the ___.</a:t>
             </a:r>
-            <a:endParaRPr lang="en-US" sz="1500" dirty="0"/>
+            <a:endParaRPr lang="en-US" sz="1800" dirty="0"/>
           </a:p>
           <a:p>
             <a:pPr indent="0" marL="0">
@@ -3755,14 +3745,14 @@
               <a:buNone/>
             </a:pPr>
             <a:r>
-              <a:rPr lang="en-US" sz="1500" dirty="0">
+              <a:rPr lang="en-US" sz="1800" dirty="0">
                 <a:solidFill>
                   <a:srgbClr val="141B26"/>
                 </a:solidFill>
               </a:rPr>
               <a:t>The ___ system would be too ___ because ___.</a:t>
             </a:r>
-            <a:endParaRPr lang="en-US" sz="1500" dirty="0"/>
+            <a:endParaRPr lang="en-US" sz="1800" dirty="0"/>
           </a:p>
         </p:txBody>
       </p:sp>
@@ -3962,14 +3952,14 @@
               <a:buNone/>
             </a:pPr>
             <a:r>
-              <a:rPr lang="en-US" sz="1400" i="1" dirty="0">
+              <a:rPr lang="en-US" sz="1600" i="1" dirty="0">
                 <a:solidFill>
                   <a:srgbClr val="5B6574"/>
                 </a:solidFill>
               </a:rPr>
               <a:t>On your worksheet exit ticket. Work alone. Hand it in as you leave.</a:t>
             </a:r>
-            <a:endParaRPr lang="en-US" sz="1400" dirty="0"/>
+            <a:endParaRPr lang="en-US" sz="1600" dirty="0"/>
           </a:p>
         </p:txBody>
       </p:sp>
@@ -3982,7 +3972,7 @@
         <p:spPr>
           <a:xfrm>
             <a:off x="548640" y="1828800"/>
-            <a:ext cx="10881360" cy="1188720"/>
+            <a:ext cx="9692640" cy="1188720"/>
           </a:xfrm>
           <a:prstGeom prst="rect">
             <a:avLst/>
@@ -3991,16 +3981,14 @@
           <a:ln/>
         </p:spPr>
         <p:txBody>
-          <a:bodyPr wrap="square" lIns="0" tIns="0" rIns="0" bIns="0" rtlCol="0" anchor="t">
-            <a:normAutofit/>
-          </a:bodyPr>
+          <a:bodyPr wrap="square" lIns="0" tIns="0" rIns="0" bIns="0" rtlCol="0" anchor="t"/>
           <a:lstStyle/>
           <a:p>
             <a:pPr indent="0" marL="0">
               <a:buNone/>
             </a:pPr>
             <a:r>
-              <a:rPr lang="en-US" sz="1800" b="1" dirty="0">
+              <a:rPr lang="en-US" sz="2200" b="1" dirty="0">
                 <a:solidFill>
                   <a:srgbClr val="7B3A8E"/>
                 </a:solidFill>
@@ -4011,14 +3999,14 @@
               <a:buNone/>
             </a:pPr>
             <a:r>
-              <a:rPr lang="en-US" sz="1800" dirty="0">
+              <a:rPr lang="en-US" sz="2200" dirty="0">
                 <a:solidFill>
                   <a:srgbClr val="141B26"/>
                 </a:solidFill>
               </a:rPr>
               <a:t>Name the two organs of the central nervous system.</a:t>
             </a:r>
-            <a:endParaRPr lang="en-US" sz="1800" dirty="0"/>
+            <a:endParaRPr lang="en-US" sz="2200" dirty="0"/>
           </a:p>
         </p:txBody>
       </p:sp>
@@ -4031,7 +4019,7 @@
         <p:spPr>
           <a:xfrm>
             <a:off x="548640" y="3017520"/>
-            <a:ext cx="10881360" cy="1188720"/>
+            <a:ext cx="9692640" cy="1188720"/>
           </a:xfrm>
           <a:prstGeom prst="rect">
             <a:avLst/>
@@ -4040,16 +4028,14 @@
           <a:ln/>
         </p:spPr>
         <p:txBody>
-          <a:bodyPr wrap="square" lIns="0" tIns="0" rIns="0" bIns="0" rtlCol="0" anchor="t">
-            <a:normAutofit/>
-          </a:bodyPr>
+          <a:bodyPr wrap="square" lIns="0" tIns="0" rIns="0" bIns="0" rtlCol="0" anchor="t"/>
           <a:lstStyle/>
           <a:p>
             <a:pPr indent="0" marL="0">
               <a:buNone/>
             </a:pPr>
             <a:r>
-              <a:rPr lang="en-US" sz="1800" b="1" dirty="0">
+              <a:rPr lang="en-US" sz="2200" b="1" dirty="0">
                 <a:solidFill>
                   <a:srgbClr val="7B3A8E"/>
                 </a:solidFill>
@@ -4060,14 +4046,14 @@
               <a:buNone/>
             </a:pPr>
             <a:r>
-              <a:rPr lang="en-US" sz="1800" dirty="0">
+              <a:rPr lang="en-US" sz="2200" dirty="0">
                 <a:solidFill>
                   <a:srgbClr val="141B26"/>
                 </a:solidFill>
               </a:rPr>
               <a:t>What is a hormone, and how does it travel round the body?</a:t>
             </a:r>
-            <a:endParaRPr lang="en-US" sz="1800" dirty="0"/>
+            <a:endParaRPr lang="en-US" sz="2200" dirty="0"/>
           </a:p>
         </p:txBody>
       </p:sp>
@@ -4080,7 +4066,7 @@
         <p:spPr>
           <a:xfrm>
             <a:off x="548640" y="4206240"/>
-            <a:ext cx="10881360" cy="1188720"/>
+            <a:ext cx="9692640" cy="1188720"/>
           </a:xfrm>
           <a:prstGeom prst="rect">
             <a:avLst/>
@@ -4089,16 +4075,14 @@
           <a:ln/>
         </p:spPr>
         <p:txBody>
-          <a:bodyPr wrap="square" lIns="0" tIns="0" rIns="0" bIns="0" rtlCol="0" anchor="t">
-            <a:normAutofit/>
-          </a:bodyPr>
+          <a:bodyPr wrap="square" lIns="0" tIns="0" rIns="0" bIns="0" rtlCol="0" anchor="t"/>
           <a:lstStyle/>
           <a:p>
             <a:pPr indent="0" marL="0">
               <a:buNone/>
             </a:pPr>
             <a:r>
-              <a:rPr lang="en-US" sz="1800" b="1" dirty="0">
+              <a:rPr lang="en-US" sz="2200" b="1" dirty="0">
                 <a:solidFill>
                   <a:srgbClr val="7B3A8E"/>
                 </a:solidFill>
@@ -4109,14 +4093,14 @@
               <a:buNone/>
             </a:pPr>
             <a:r>
-              <a:rPr lang="en-US" sz="1800" dirty="0">
+              <a:rPr lang="en-US" sz="2200" dirty="0">
                 <a:solidFill>
                   <a:srgbClr val="141B26"/>
                 </a:solidFill>
               </a:rPr>
               <a:t>Give one difference between a nervous response and a hormonal response.</a:t>
             </a:r>
-            <a:endParaRPr lang="en-US" sz="1800" dirty="0"/>
+            <a:endParaRPr lang="en-US" sz="2200" dirty="0"/>
           </a:p>
         </p:txBody>
       </p:sp>
@@ -4375,7 +4359,7 @@
         <p:spPr>
           <a:xfrm>
             <a:off x="548640" y="1371600"/>
-            <a:ext cx="10881360" cy="4480560"/>
+            <a:ext cx="10881360" cy="4114800"/>
           </a:xfrm>
           <a:prstGeom prst="rect">
             <a:avLst/>
@@ -4384,81 +4368,79 @@
           <a:ln/>
         </p:spPr>
         <p:txBody>
-          <a:bodyPr wrap="square" lIns="0" tIns="0" rIns="0" bIns="0" rtlCol="0" anchor="t">
-            <a:normAutofit/>
-          </a:bodyPr>
+          <a:bodyPr wrap="square" lIns="0" tIns="0" rIns="0" bIns="0" rtlCol="0" anchor="t"/>
           <a:lstStyle/>
           <a:p>
             <a:pPr marL="342900" indent="-342900">
               <a:spcAft>
-                <a:spcPts val="1000"/>
+                <a:spcPts val="1200"/>
               </a:spcAft>
               <a:buSzPct val="100000"/>
               <a:buChar char="✓"/>
             </a:pPr>
             <a:r>
-              <a:rPr lang="en-US" sz="1700" dirty="0">
+              <a:rPr lang="en-US" sz="2000" dirty="0">
                 <a:solidFill>
                   <a:srgbClr val="141B26"/>
                 </a:solidFill>
               </a:rPr>
               <a:t>Receptors detect stimuli and send impulses along nerves to the brain and spinal cord (the CNS).</a:t>
             </a:r>
-            <a:endParaRPr lang="en-US" sz="1700" dirty="0"/>
+            <a:endParaRPr lang="en-US" sz="2000" dirty="0"/>
           </a:p>
           <a:p>
             <a:pPr marL="342900" indent="-342900">
               <a:spcAft>
-                <a:spcPts val="1000"/>
+                <a:spcPts val="1200"/>
               </a:spcAft>
               <a:buSzPct val="100000"/>
               <a:buChar char="✓"/>
             </a:pPr>
             <a:r>
-              <a:rPr lang="en-US" sz="1700" dirty="0">
+              <a:rPr lang="en-US" sz="2000" dirty="0">
                 <a:solidFill>
                   <a:srgbClr val="141B26"/>
                 </a:solidFill>
               </a:rPr>
               <a:t>The CNS sends impulses to effectors: muscles contract, glands release substances.</a:t>
             </a:r>
-            <a:endParaRPr lang="en-US" sz="1700" dirty="0"/>
+            <a:endParaRPr lang="en-US" sz="2000" dirty="0"/>
           </a:p>
           <a:p>
             <a:pPr marL="342900" indent="-342900">
               <a:spcAft>
-                <a:spcPts val="1000"/>
+                <a:spcPts val="1200"/>
               </a:spcAft>
               <a:buSzPct val="100000"/>
               <a:buChar char="✓"/>
             </a:pPr>
             <a:r>
-              <a:rPr lang="en-US" sz="1700" dirty="0">
+              <a:rPr lang="en-US" sz="2000" dirty="0">
                 <a:solidFill>
                   <a:srgbClr val="141B26"/>
                 </a:solidFill>
               </a:rPr>
               <a:t>Hormones are chemical messengers made in glands, carried in the blood to target organs.</a:t>
             </a:r>
-            <a:endParaRPr lang="en-US" sz="1700" dirty="0"/>
+            <a:endParaRPr lang="en-US" sz="2000" dirty="0"/>
           </a:p>
           <a:p>
             <a:pPr marL="342900" indent="-342900">
               <a:spcAft>
-                <a:spcPts val="1000"/>
+                <a:spcPts val="1200"/>
               </a:spcAft>
               <a:buSzPct val="100000"/>
               <a:buChar char="✓"/>
             </a:pPr>
             <a:r>
-              <a:rPr lang="en-US" sz="1700" dirty="0">
+              <a:rPr lang="en-US" sz="2000" dirty="0">
                 <a:solidFill>
                   <a:srgbClr val="141B26"/>
                 </a:solidFill>
               </a:rPr>
               <a:t>Nervous responses are fast and local; hormonal responses are slower, longer and widespread.</a:t>
             </a:r>
-            <a:endParaRPr lang="en-US" sz="1700" dirty="0"/>
+            <a:endParaRPr lang="en-US" sz="2000" dirty="0"/>
           </a:p>
         </p:txBody>
       </p:sp>
@@ -4487,7 +4469,7 @@
               <a:buNone/>
             </a:pPr>
             <a:r>
-              <a:rPr lang="en-US" sz="1300" b="1" dirty="0">
+              <a:rPr lang="en-US" sz="1500" b="1" dirty="0">
                 <a:solidFill>
                   <a:srgbClr val="7B3A8E"/>
                 </a:solidFill>
@@ -4498,14 +4480,14 @@
               <a:buNone/>
             </a:pPr>
             <a:r>
-              <a:rPr lang="en-US" sz="1300" dirty="0">
+              <a:rPr lang="en-US" sz="1500" dirty="0">
                 <a:solidFill>
                   <a:srgbClr val="141B26"/>
                 </a:solidFill>
               </a:rPr>
               <a:t>Treating diseases: antibiotics, antivirals and how transgenic bacteria make human insulin.</a:t>
             </a:r>
-            <a:endParaRPr lang="en-US" sz="1300" dirty="0"/>
+            <a:endParaRPr lang="en-US" sz="1500" dirty="0"/>
           </a:p>
         </p:txBody>
       </p:sp>
@@ -4773,77 +4755,75 @@
           <a:ln/>
         </p:spPr>
         <p:txBody>
-          <a:bodyPr wrap="square" lIns="0" tIns="0" rIns="0" bIns="0" rtlCol="0" anchor="t">
-            <a:normAutofit/>
-          </a:bodyPr>
+          <a:bodyPr wrap="square" lIns="0" tIns="0" rIns="0" bIns="0" rtlCol="0" anchor="t"/>
           <a:lstStyle/>
           <a:p>
             <a:pPr indent="0" marL="0">
               <a:spcAft>
-                <a:spcPts val="1000"/>
+                <a:spcPts val="1200"/>
               </a:spcAft>
               <a:buNone/>
             </a:pPr>
             <a:r>
-              <a:rPr lang="en-US" sz="2000" dirty="0">
+              <a:rPr lang="en-US" sz="2400" dirty="0">
                 <a:solidFill>
                   <a:srgbClr val="141B26"/>
                 </a:solidFill>
               </a:rPr>
               <a:t>You touch a hot pan and pull your hand away before you even feel the pain.</a:t>
             </a:r>
-            <a:endParaRPr lang="en-US" sz="2000" dirty="0"/>
+            <a:endParaRPr lang="en-US" sz="2400" dirty="0"/>
           </a:p>
           <a:p>
             <a:pPr indent="0" marL="0">
               <a:spcAft>
-                <a:spcPts val="1000"/>
+                <a:spcPts val="1200"/>
               </a:spcAft>
               <a:buNone/>
             </a:pPr>
             <a:r>
-              <a:rPr lang="en-US" sz="2000" dirty="0">
+              <a:rPr lang="en-US" sz="2400" dirty="0">
                 <a:solidFill>
                   <a:srgbClr val="141B26"/>
                 </a:solidFill>
               </a:rPr>
               <a:t>1. Which organ detected the heat?</a:t>
             </a:r>
-            <a:endParaRPr lang="en-US" sz="2000" dirty="0"/>
+            <a:endParaRPr lang="en-US" sz="2400" dirty="0"/>
           </a:p>
           <a:p>
             <a:pPr indent="0" marL="0">
               <a:spcAft>
-                <a:spcPts val="1000"/>
+                <a:spcPts val="1200"/>
               </a:spcAft>
               <a:buNone/>
             </a:pPr>
             <a:r>
-              <a:rPr lang="en-US" sz="2000" dirty="0">
+              <a:rPr lang="en-US" sz="2400" dirty="0">
                 <a:solidFill>
                   <a:srgbClr val="141B26"/>
                 </a:solidFill>
               </a:rPr>
               <a:t>2. Which organ moved your hand?</a:t>
             </a:r>
-            <a:endParaRPr lang="en-US" sz="2000" dirty="0"/>
+            <a:endParaRPr lang="en-US" sz="2400" dirty="0"/>
           </a:p>
           <a:p>
             <a:pPr indent="0" marL="0">
               <a:spcAft>
-                <a:spcPts val="1000"/>
+                <a:spcPts val="1200"/>
               </a:spcAft>
               <a:buNone/>
             </a:pPr>
             <a:r>
-              <a:rPr lang="en-US" sz="2000" dirty="0">
+              <a:rPr lang="en-US" sz="2400" dirty="0">
                 <a:solidFill>
                   <a:srgbClr val="141B26"/>
                 </a:solidFill>
               </a:rPr>
               <a:t>3. Which organ system connects them?</a:t>
             </a:r>
-            <a:endParaRPr lang="en-US" sz="2000" dirty="0"/>
+            <a:endParaRPr lang="en-US" sz="2400" dirty="0"/>
           </a:p>
         </p:txBody>
       </p:sp>
@@ -5026,8 +5006,8 @@
         </p:nvSpPr>
         <p:spPr>
           <a:xfrm>
-            <a:off x="548640" y="1325880"/>
-            <a:ext cx="5669280" cy="457200"/>
+            <a:off x="548640" y="1280160"/>
+            <a:ext cx="5486400" cy="411480"/>
           </a:xfrm>
           <a:prstGeom prst="rect">
             <a:avLst/>
@@ -5043,14 +5023,14 @@
               <a:buNone/>
             </a:pPr>
             <a:r>
-              <a:rPr lang="en-US" sz="2000" b="1" dirty="0">
+              <a:rPr lang="en-US" sz="2200" b="1" dirty="0">
                 <a:solidFill>
                   <a:srgbClr val="7B3A8E"/>
                 </a:solidFill>
               </a:rPr>
               <a:t>Today I can ...</a:t>
             </a:r>
-            <a:endParaRPr lang="en-US" sz="2000" dirty="0"/>
+            <a:endParaRPr lang="en-US" sz="2200" dirty="0"/>
           </a:p>
         </p:txBody>
       </p:sp>
@@ -5062,8 +5042,8 @@
         </p:nvSpPr>
         <p:spPr>
           <a:xfrm>
-            <a:off x="594360" y="1947672"/>
-            <a:ext cx="292608" cy="292608"/>
+            <a:off x="594360" y="1810512"/>
+            <a:ext cx="310896" cy="310896"/>
           </a:xfrm>
           <a:prstGeom prst="rect">
             <a:avLst/>
@@ -5087,8 +5067,8 @@
         </p:nvSpPr>
         <p:spPr>
           <a:xfrm>
-            <a:off x="1051560" y="1874520"/>
-            <a:ext cx="5120640" cy="868680"/>
+            <a:off x="1097280" y="1737360"/>
+            <a:ext cx="10332720" cy="868680"/>
           </a:xfrm>
           <a:prstGeom prst="rect">
             <a:avLst/>
@@ -5097,23 +5077,21 @@
           <a:ln/>
         </p:spPr>
         <p:txBody>
-          <a:bodyPr wrap="square" lIns="0" tIns="0" rIns="0" bIns="0" rtlCol="0" anchor="t">
-            <a:normAutofit/>
-          </a:bodyPr>
+          <a:bodyPr wrap="square" lIns="0" tIns="0" rIns="0" bIns="0" rtlCol="0" anchor="t"/>
           <a:lstStyle/>
           <a:p>
             <a:pPr indent="0" marL="0">
               <a:buNone/>
             </a:pPr>
             <a:r>
-              <a:rPr lang="en-US" sz="1600" dirty="0">
+              <a:rPr lang="en-US" sz="2000" dirty="0">
                 <a:solidFill>
                   <a:srgbClr val="141B26"/>
                 </a:solidFill>
               </a:rPr>
               <a:t>I can describe how the nervous system detects a stimulus and produces a response.</a:t>
             </a:r>
-            <a:endParaRPr lang="en-US" sz="1600" dirty="0"/>
+            <a:endParaRPr lang="en-US" sz="2000" dirty="0"/>
           </a:p>
         </p:txBody>
       </p:sp>
@@ -5125,8 +5103,8 @@
         </p:nvSpPr>
         <p:spPr>
           <a:xfrm>
-            <a:off x="594360" y="2907792"/>
-            <a:ext cx="292608" cy="292608"/>
+            <a:off x="594360" y="2679192"/>
+            <a:ext cx="310896" cy="310896"/>
           </a:xfrm>
           <a:prstGeom prst="rect">
             <a:avLst/>
@@ -5150,8 +5128,8 @@
         </p:nvSpPr>
         <p:spPr>
           <a:xfrm>
-            <a:off x="1051560" y="2834640"/>
-            <a:ext cx="5120640" cy="868680"/>
+            <a:off x="1097280" y="2606040"/>
+            <a:ext cx="10332720" cy="868680"/>
           </a:xfrm>
           <a:prstGeom prst="rect">
             <a:avLst/>
@@ -5160,23 +5138,21 @@
           <a:ln/>
         </p:spPr>
         <p:txBody>
-          <a:bodyPr wrap="square" lIns="0" tIns="0" rIns="0" bIns="0" rtlCol="0" anchor="t">
-            <a:normAutofit/>
-          </a:bodyPr>
+          <a:bodyPr wrap="square" lIns="0" tIns="0" rIns="0" bIns="0" rtlCol="0" anchor="t"/>
           <a:lstStyle/>
           <a:p>
             <a:pPr indent="0" marL="0">
               <a:buNone/>
             </a:pPr>
             <a:r>
-              <a:rPr lang="en-US" sz="1600" dirty="0">
+              <a:rPr lang="en-US" sz="2000" dirty="0">
                 <a:solidFill>
                   <a:srgbClr val="141B26"/>
                 </a:solidFill>
               </a:rPr>
               <a:t>I can describe how hormones affect the body and compare the nervous and hormonal systems.</a:t>
             </a:r>
-            <a:endParaRPr lang="en-US" sz="1600" dirty="0"/>
+            <a:endParaRPr lang="en-US" sz="2000" dirty="0"/>
           </a:p>
         </p:txBody>
       </p:sp>
@@ -5188,8 +5164,8 @@
         </p:nvSpPr>
         <p:spPr>
           <a:xfrm>
-            <a:off x="6583680" y="1325880"/>
-            <a:ext cx="5029200" cy="457200"/>
+            <a:off x="548640" y="3611880"/>
+            <a:ext cx="5486400" cy="411480"/>
           </a:xfrm>
           <a:prstGeom prst="rect">
             <a:avLst/>
@@ -5205,14 +5181,14 @@
               <a:buNone/>
             </a:pPr>
             <a:r>
-              <a:rPr lang="en-US" sz="2000" b="1" dirty="0">
+              <a:rPr lang="en-US" sz="2200" b="1" dirty="0">
                 <a:solidFill>
                   <a:srgbClr val="7B3A8E"/>
                 </a:solidFill>
               </a:rPr>
               <a:t>Key words today</a:t>
             </a:r>
-            <a:endParaRPr lang="en-US" sz="2000" dirty="0"/>
+            <a:endParaRPr lang="en-US" sz="2200" dirty="0"/>
           </a:p>
         </p:txBody>
       </p:sp>
@@ -5224,8 +5200,8 @@
         </p:nvSpPr>
         <p:spPr>
           <a:xfrm>
-            <a:off x="6583680" y="1874520"/>
-            <a:ext cx="5029200" cy="4023360"/>
+            <a:off x="548640" y="4069080"/>
+            <a:ext cx="3515258" cy="1920240"/>
           </a:xfrm>
           <a:prstGeom prst="rect">
             <a:avLst/>
@@ -5234,350 +5210,285 @@
           <a:ln/>
         </p:spPr>
         <p:txBody>
-          <a:bodyPr wrap="square" lIns="0" tIns="0" rIns="0" bIns="0" rtlCol="0" anchor="t">
-            <a:normAutofit/>
-          </a:bodyPr>
+          <a:bodyPr wrap="square" lIns="0" tIns="0" rIns="0" bIns="0" rtlCol="0" anchor="t"/>
+          <a:lstStyle/>
+          <a:p>
+            <a:pPr marL="304800" indent="-304800">
+              <a:spcAft>
+                <a:spcPts val="600"/>
+              </a:spcAft>
+              <a:buSzPct val="100000"/>
+              <a:buChar char="•"/>
+            </a:pPr>
+            <a:r>
+              <a:rPr lang="en-US" sz="2100" b="1" dirty="0">
+                <a:solidFill>
+                  <a:srgbClr val="0F2A5F"/>
+                </a:solidFill>
+              </a:rPr>
+              <a:t>nervous system</a:t>
+            </a:r>
+            <a:endParaRPr lang="en-US" sz="2100" dirty="0"/>
+          </a:p>
+          <a:p>
+            <a:pPr marL="304800" indent="-304800">
+              <a:spcAft>
+                <a:spcPts val="600"/>
+              </a:spcAft>
+              <a:buSzPct val="100000"/>
+              <a:buChar char="•"/>
+            </a:pPr>
+            <a:r>
+              <a:rPr lang="en-US" sz="2100" b="1" dirty="0">
+                <a:solidFill>
+                  <a:srgbClr val="0F2A5F"/>
+                </a:solidFill>
+              </a:rPr>
+              <a:t>central nervous system</a:t>
+            </a:r>
+            <a:endParaRPr lang="en-US" sz="2100" dirty="0"/>
+          </a:p>
+          <a:p>
+            <a:pPr marL="304800" indent="-304800">
+              <a:spcAft>
+                <a:spcPts val="600"/>
+              </a:spcAft>
+              <a:buSzPct val="100000"/>
+              <a:buChar char="•"/>
+            </a:pPr>
+            <a:r>
+              <a:rPr lang="en-US" sz="2100" b="1" dirty="0">
+                <a:solidFill>
+                  <a:srgbClr val="0F2A5F"/>
+                </a:solidFill>
+              </a:rPr>
+              <a:t>nerve</a:t>
+            </a:r>
+            <a:endParaRPr lang="en-US" sz="2100" dirty="0"/>
+          </a:p>
+          <a:p>
+            <a:pPr marL="304800" indent="-304800">
+              <a:spcAft>
+                <a:spcPts val="600"/>
+              </a:spcAft>
+              <a:buSzPct val="100000"/>
+              <a:buChar char="•"/>
+            </a:pPr>
+            <a:r>
+              <a:rPr lang="en-US" sz="2100" b="1" dirty="0">
+                <a:solidFill>
+                  <a:srgbClr val="0F2A5F"/>
+                </a:solidFill>
+              </a:rPr>
+              <a:t>stimulus</a:t>
+            </a:r>
+            <a:endParaRPr lang="en-US" sz="2100" dirty="0"/>
+          </a:p>
+        </p:txBody>
+      </p:sp>
+      <p:sp>
+        <p:nvSpPr>
+          <p:cNvPr id="12" name="Text 10"/>
+          <p:cNvSpPr txBox="1"/>
+          <p:nvPr/>
+        </p:nvSpPr>
+        <p:spPr>
+          <a:xfrm>
+            <a:off x="4338218" y="4069080"/>
+            <a:ext cx="3515258" cy="1920240"/>
+          </a:xfrm>
+          <a:prstGeom prst="rect">
+            <a:avLst/>
+          </a:prstGeom>
+          <a:noFill/>
+          <a:ln/>
+        </p:spPr>
+        <p:txBody>
+          <a:bodyPr wrap="square" lIns="0" tIns="0" rIns="0" bIns="0" rtlCol="0" anchor="t"/>
+          <a:lstStyle/>
+          <a:p>
+            <a:pPr marL="304800" indent="-304800">
+              <a:spcAft>
+                <a:spcPts val="600"/>
+              </a:spcAft>
+              <a:buSzPct val="100000"/>
+              <a:buChar char="•"/>
+            </a:pPr>
+            <a:r>
+              <a:rPr lang="en-US" sz="2100" b="1" dirty="0">
+                <a:solidFill>
+                  <a:srgbClr val="0F2A5F"/>
+                </a:solidFill>
+              </a:rPr>
+              <a:t>receptor</a:t>
+            </a:r>
+            <a:endParaRPr lang="en-US" sz="2100" dirty="0"/>
+          </a:p>
+          <a:p>
+            <a:pPr marL="304800" indent="-304800">
+              <a:spcAft>
+                <a:spcPts val="600"/>
+              </a:spcAft>
+              <a:buSzPct val="100000"/>
+              <a:buChar char="•"/>
+            </a:pPr>
+            <a:r>
+              <a:rPr lang="en-US" sz="2100" b="1" dirty="0">
+                <a:solidFill>
+                  <a:srgbClr val="0F2A5F"/>
+                </a:solidFill>
+              </a:rPr>
+              <a:t>impulse</a:t>
+            </a:r>
+            <a:endParaRPr lang="en-US" sz="2100" dirty="0"/>
+          </a:p>
+          <a:p>
+            <a:pPr marL="304800" indent="-304800">
+              <a:spcAft>
+                <a:spcPts val="600"/>
+              </a:spcAft>
+              <a:buSzPct val="100000"/>
+              <a:buChar char="•"/>
+            </a:pPr>
+            <a:r>
+              <a:rPr lang="en-US" sz="2100" b="1" dirty="0">
+                <a:solidFill>
+                  <a:srgbClr val="0F2A5F"/>
+                </a:solidFill>
+              </a:rPr>
+              <a:t>effector</a:t>
+            </a:r>
+            <a:endParaRPr lang="en-US" sz="2100" dirty="0"/>
+          </a:p>
+          <a:p>
+            <a:pPr marL="304800" indent="-304800">
+              <a:spcAft>
+                <a:spcPts val="600"/>
+              </a:spcAft>
+              <a:buSzPct val="100000"/>
+              <a:buChar char="•"/>
+            </a:pPr>
+            <a:r>
+              <a:rPr lang="en-US" sz="2100" b="1" dirty="0">
+                <a:solidFill>
+                  <a:srgbClr val="0F2A5F"/>
+                </a:solidFill>
+              </a:rPr>
+              <a:t>hormone</a:t>
+            </a:r>
+            <a:endParaRPr lang="en-US" sz="2100" dirty="0"/>
+          </a:p>
+        </p:txBody>
+      </p:sp>
+      <p:sp>
+        <p:nvSpPr>
+          <p:cNvPr id="13" name="Text 11"/>
+          <p:cNvSpPr txBox="1"/>
+          <p:nvPr/>
+        </p:nvSpPr>
+        <p:spPr>
+          <a:xfrm>
+            <a:off x="8127797" y="4069080"/>
+            <a:ext cx="3515258" cy="1920240"/>
+          </a:xfrm>
+          <a:prstGeom prst="rect">
+            <a:avLst/>
+          </a:prstGeom>
+          <a:noFill/>
+          <a:ln/>
+        </p:spPr>
+        <p:txBody>
+          <a:bodyPr wrap="square" lIns="0" tIns="0" rIns="0" bIns="0" rtlCol="0" anchor="t"/>
+          <a:lstStyle/>
+          <a:p>
+            <a:pPr marL="304800" indent="-304800">
+              <a:spcAft>
+                <a:spcPts val="600"/>
+              </a:spcAft>
+              <a:buSzPct val="100000"/>
+              <a:buChar char="•"/>
+            </a:pPr>
+            <a:r>
+              <a:rPr lang="en-US" sz="2200" b="1" dirty="0">
+                <a:solidFill>
+                  <a:srgbClr val="0F2A5F"/>
+                </a:solidFill>
+              </a:rPr>
+              <a:t>gland</a:t>
+            </a:r>
+            <a:endParaRPr lang="en-US" sz="2200" dirty="0"/>
+          </a:p>
+          <a:p>
+            <a:pPr marL="304800" indent="-304800">
+              <a:spcAft>
+                <a:spcPts val="600"/>
+              </a:spcAft>
+              <a:buSzPct val="100000"/>
+              <a:buChar char="•"/>
+            </a:pPr>
+            <a:r>
+              <a:rPr lang="en-US" sz="2200" b="1" dirty="0">
+                <a:solidFill>
+                  <a:srgbClr val="0F2A5F"/>
+                </a:solidFill>
+              </a:rPr>
+              <a:t>target organ</a:t>
+            </a:r>
+            <a:endParaRPr lang="en-US" sz="2200" dirty="0"/>
+          </a:p>
+          <a:p>
+            <a:pPr marL="304800" indent="-304800">
+              <a:spcAft>
+                <a:spcPts val="600"/>
+              </a:spcAft>
+              <a:buSzPct val="100000"/>
+              <a:buChar char="•"/>
+            </a:pPr>
+            <a:r>
+              <a:rPr lang="en-US" sz="2200" b="1" dirty="0">
+                <a:solidFill>
+                  <a:srgbClr val="0F2A5F"/>
+                </a:solidFill>
+              </a:rPr>
+              <a:t>insulin</a:t>
+            </a:r>
+            <a:endParaRPr lang="en-US" sz="2200" dirty="0"/>
+          </a:p>
+        </p:txBody>
+      </p:sp>
+      <p:sp>
+        <p:nvSpPr>
+          <p:cNvPr id="14" name="Text 12"/>
+          <p:cNvSpPr txBox="1"/>
+          <p:nvPr/>
+        </p:nvSpPr>
+        <p:spPr>
+          <a:xfrm>
+            <a:off x="548640" y="6035040"/>
+            <a:ext cx="10881360" cy="320040"/>
+          </a:xfrm>
+          <a:prstGeom prst="rect">
+            <a:avLst/>
+          </a:prstGeom>
+          <a:noFill/>
+          <a:ln/>
+        </p:spPr>
+        <p:txBody>
+          <a:bodyPr wrap="square" lIns="0" tIns="0" rIns="0" bIns="0" rtlCol="0" anchor="ctr"/>
           <a:lstStyle/>
           <a:p>
             <a:pPr indent="0" marL="0">
-              <a:spcAft>
-                <a:spcPts val="500"/>
-              </a:spcAft>
-              <a:buNone/>
-            </a:pPr>
-            <a:r>
-              <a:rPr lang="en-US" sz="1300" b="1" dirty="0">
-                <a:solidFill>
-                  <a:srgbClr val="0F2A5F"/>
-                </a:solidFill>
-              </a:rPr>
-              <a:t>nervous system</a:t>
-            </a:r>
-            <a:pPr indent="0" marL="0">
-              <a:spcAft>
-                <a:spcPts val="500"/>
-              </a:spcAft>
-              <a:buNone/>
-            </a:pPr>
-            <a:r>
-              <a:rPr lang="en-US" sz="1300" dirty="0">
-                <a:solidFill>
-                  <a:srgbClr val="141B26"/>
-                </a:solidFill>
-              </a:rPr>
-              <a:t>  the organ system that senses changes and makes the body respond rapidly</a:t>
-            </a:r>
-            <a:endParaRPr lang="en-US" sz="1300" dirty="0"/>
-          </a:p>
-          <a:p>
-            <a:pPr indent="0" marL="0">
-              <a:spcAft>
-                <a:spcPts val="500"/>
-              </a:spcAft>
-              <a:buNone/>
-            </a:pPr>
-            <a:r>
-              <a:rPr lang="en-US" sz="1300" b="1" dirty="0">
-                <a:solidFill>
-                  <a:srgbClr val="0F2A5F"/>
-                </a:solidFill>
-              </a:rPr>
-              <a:t>central nervous system</a:t>
-            </a:r>
-            <a:pPr indent="0" marL="0">
-              <a:spcAft>
-                <a:spcPts val="500"/>
-              </a:spcAft>
-              <a:buNone/>
-            </a:pPr>
-            <a:r>
-              <a:rPr lang="en-US" sz="1300" dirty="0">
-                <a:solidFill>
-                  <a:srgbClr val="141B26"/>
-                </a:solidFill>
-              </a:rPr>
-              <a:t>  the brain and spinal cord (CNS)</a:t>
-            </a:r>
-            <a:endParaRPr lang="en-US" sz="1300" dirty="0"/>
-          </a:p>
-          <a:p>
-            <a:pPr indent="0" marL="0">
-              <a:spcAft>
-                <a:spcPts val="500"/>
-              </a:spcAft>
-              <a:buNone/>
-            </a:pPr>
-            <a:r>
-              <a:rPr lang="en-US" sz="1300" b="1" dirty="0">
-                <a:solidFill>
-                  <a:srgbClr val="0F2A5F"/>
-                </a:solidFill>
-              </a:rPr>
-              <a:t>nerve</a:t>
-            </a:r>
-            <a:pPr indent="0" marL="0">
-              <a:spcAft>
-                <a:spcPts val="500"/>
-              </a:spcAft>
-              <a:buNone/>
-            </a:pPr>
-            <a:r>
-              <a:rPr lang="en-US" sz="1300" dirty="0">
-                <a:solidFill>
-                  <a:srgbClr val="141B26"/>
-                </a:solidFill>
-              </a:rPr>
-              <a:t>  an organ that carries impulses between the CNS and the rest of the body</a:t>
-            </a:r>
-            <a:endParaRPr lang="en-US" sz="1300" dirty="0"/>
-          </a:p>
-          <a:p>
-            <a:pPr indent="0" marL="0">
-              <a:spcAft>
-                <a:spcPts val="500"/>
-              </a:spcAft>
-              <a:buNone/>
-            </a:pPr>
-            <a:r>
-              <a:rPr lang="en-US" sz="1300" b="1" dirty="0">
-                <a:solidFill>
-                  <a:srgbClr val="0F2A5F"/>
-                </a:solidFill>
-              </a:rPr>
-              <a:t>stimulus</a:t>
-            </a:r>
-            <a:pPr indent="0" marL="0">
-              <a:spcAft>
-                <a:spcPts val="500"/>
-              </a:spcAft>
-              <a:buNone/>
-            </a:pPr>
-            <a:r>
-              <a:rPr lang="en-US" sz="1300" dirty="0">
-                <a:solidFill>
-                  <a:srgbClr val="141B26"/>
-                </a:solidFill>
-              </a:rPr>
-              <a:t>  a change that can be detected, e.g. light, sound, touch</a:t>
-            </a:r>
-            <a:endParaRPr lang="en-US" sz="1300" dirty="0"/>
-          </a:p>
-          <a:p>
-            <a:pPr indent="0" marL="0">
-              <a:spcAft>
-                <a:spcPts val="500"/>
-              </a:spcAft>
-              <a:buNone/>
-            </a:pPr>
-            <a:r>
-              <a:rPr lang="en-US" sz="1300" b="1" dirty="0">
-                <a:solidFill>
-                  <a:srgbClr val="0F2A5F"/>
-                </a:solidFill>
-              </a:rPr>
-              <a:t>receptor</a:t>
-            </a:r>
-            <a:pPr indent="0" marL="0">
-              <a:spcAft>
-                <a:spcPts val="500"/>
-              </a:spcAft>
-              <a:buNone/>
-            </a:pPr>
-            <a:r>
-              <a:rPr lang="en-US" sz="1300" dirty="0">
-                <a:solidFill>
-                  <a:srgbClr val="141B26"/>
-                </a:solidFill>
-              </a:rPr>
-              <a:t>  a cell in a sense organ that detects a stimulus</a:t>
-            </a:r>
-            <a:endParaRPr lang="en-US" sz="1300" dirty="0"/>
-          </a:p>
-          <a:p>
-            <a:pPr indent="0" marL="0">
-              <a:spcAft>
-                <a:spcPts val="500"/>
-              </a:spcAft>
-              <a:buNone/>
-            </a:pPr>
-            <a:r>
-              <a:rPr lang="en-US" sz="1300" b="1" dirty="0">
-                <a:solidFill>
-                  <a:srgbClr val="0F2A5F"/>
-                </a:solidFill>
-              </a:rPr>
-              <a:t>impulse</a:t>
-            </a:r>
-            <a:pPr indent="0" marL="0">
-              <a:spcAft>
-                <a:spcPts val="500"/>
-              </a:spcAft>
-              <a:buNone/>
-            </a:pPr>
-            <a:r>
-              <a:rPr lang="en-US" sz="1300" dirty="0">
-                <a:solidFill>
-                  <a:srgbClr val="141B26"/>
-                </a:solidFill>
-              </a:rPr>
-              <a:t>  an electrical signal that travels along a nerve</a:t>
-            </a:r>
-            <a:endParaRPr lang="en-US" sz="1300" dirty="0"/>
-          </a:p>
-          <a:p>
-            <a:pPr indent="0" marL="0">
-              <a:spcAft>
-                <a:spcPts val="500"/>
-              </a:spcAft>
-              <a:buNone/>
-            </a:pPr>
-            <a:r>
-              <a:rPr lang="en-US" sz="1300" b="1" dirty="0">
-                <a:solidFill>
-                  <a:srgbClr val="0F2A5F"/>
-                </a:solidFill>
-              </a:rPr>
-              <a:t>effector</a:t>
-            </a:r>
-            <a:pPr indent="0" marL="0">
-              <a:spcAft>
-                <a:spcPts val="500"/>
-              </a:spcAft>
-              <a:buNone/>
-            </a:pPr>
-            <a:r>
-              <a:rPr lang="en-US" sz="1300" dirty="0">
-                <a:solidFill>
-                  <a:srgbClr val="141B26"/>
-                </a:solidFill>
-              </a:rPr>
-              <a:t>  a muscle or gland that carries out a response</a:t>
-            </a:r>
-            <a:endParaRPr lang="en-US" sz="1300" dirty="0"/>
-          </a:p>
-          <a:p>
-            <a:pPr indent="0" marL="0">
-              <a:spcAft>
-                <a:spcPts val="500"/>
-              </a:spcAft>
-              <a:buNone/>
-            </a:pPr>
-            <a:r>
-              <a:rPr lang="en-US" sz="1300" b="1" dirty="0">
-                <a:solidFill>
-                  <a:srgbClr val="0F2A5F"/>
-                </a:solidFill>
-              </a:rPr>
-              <a:t>hormone</a:t>
-            </a:r>
-            <a:pPr indent="0" marL="0">
-              <a:spcAft>
-                <a:spcPts val="500"/>
-              </a:spcAft>
-              <a:buNone/>
-            </a:pPr>
-            <a:r>
-              <a:rPr lang="en-US" sz="1300" dirty="0">
-                <a:solidFill>
-                  <a:srgbClr val="141B26"/>
-                </a:solidFill>
-              </a:rPr>
-              <a:t>  a chemical messenger made in a gland and carried in the blood</a:t>
-            </a:r>
-            <a:endParaRPr lang="en-US" sz="1300" dirty="0"/>
-          </a:p>
-          <a:p>
-            <a:pPr indent="0" marL="0">
-              <a:spcAft>
-                <a:spcPts val="500"/>
-              </a:spcAft>
-              <a:buNone/>
-            </a:pPr>
-            <a:r>
-              <a:rPr lang="en-US" sz="1300" b="1" dirty="0">
-                <a:solidFill>
-                  <a:srgbClr val="0F2A5F"/>
-                </a:solidFill>
-              </a:rPr>
-              <a:t>gland</a:t>
-            </a:r>
-            <a:pPr indent="0" marL="0">
-              <a:spcAft>
-                <a:spcPts val="500"/>
-              </a:spcAft>
-              <a:buNone/>
-            </a:pPr>
-            <a:r>
-              <a:rPr lang="en-US" sz="1300" dirty="0">
-                <a:solidFill>
-                  <a:srgbClr val="141B26"/>
-                </a:solidFill>
-              </a:rPr>
-              <a:t>  an organ that makes and releases a substance, e.g. a hormone</a:t>
-            </a:r>
-            <a:endParaRPr lang="en-US" sz="1300" dirty="0"/>
-          </a:p>
-          <a:p>
-            <a:pPr indent="0" marL="0">
-              <a:spcAft>
-                <a:spcPts val="500"/>
-              </a:spcAft>
-              <a:buNone/>
-            </a:pPr>
-            <a:r>
-              <a:rPr lang="en-US" sz="1300" b="1" dirty="0">
-                <a:solidFill>
-                  <a:srgbClr val="0F2A5F"/>
-                </a:solidFill>
-              </a:rPr>
-              <a:t>target organ</a:t>
-            </a:r>
-            <a:pPr indent="0" marL="0">
-              <a:spcAft>
-                <a:spcPts val="500"/>
-              </a:spcAft>
-              <a:buNone/>
-            </a:pPr>
-            <a:r>
-              <a:rPr lang="en-US" sz="1300" dirty="0">
-                <a:solidFill>
-                  <a:srgbClr val="141B26"/>
-                </a:solidFill>
-              </a:rPr>
-              <a:t>  an organ that responds to a particular hormone</a:t>
-            </a:r>
-            <a:endParaRPr lang="en-US" sz="1300" dirty="0"/>
-          </a:p>
-          <a:p>
-            <a:pPr indent="0" marL="0">
-              <a:spcAft>
-                <a:spcPts val="500"/>
-              </a:spcAft>
-              <a:buNone/>
-            </a:pPr>
-            <a:r>
-              <a:rPr lang="en-US" sz="1300" b="1" dirty="0">
-                <a:solidFill>
-                  <a:srgbClr val="0F2A5F"/>
-                </a:solidFill>
-              </a:rPr>
-              <a:t>insulin</a:t>
-            </a:r>
-            <a:pPr indent="0" marL="0">
-              <a:spcAft>
-                <a:spcPts val="500"/>
-              </a:spcAft>
-              <a:buNone/>
-            </a:pPr>
-            <a:r>
-              <a:rPr lang="en-US" sz="1300" dirty="0">
-                <a:solidFill>
-                  <a:srgbClr val="141B26"/>
-                </a:solidFill>
-              </a:rPr>
-              <a:t>  a hormone from the pancreas that makes cells take up glucose from the blood</a:t>
-            </a:r>
-            <a:endParaRPr lang="en-US" sz="1300" dirty="0"/>
+              <a:buNone/>
+            </a:pPr>
+            <a:r>
+              <a:rPr lang="en-US" sz="1400" i="1" dirty="0">
+                <a:solidFill>
+                  <a:srgbClr val="5B6574"/>
+                </a:solidFill>
+              </a:rPr>
+              <a:t>Meanings are in the key words box on your worksheet.</a:t>
+            </a:r>
+            <a:endParaRPr lang="en-US" sz="1400" dirty="0"/>
           </a:p>
         </p:txBody>
       </p:sp>
@@ -5761,7 +5672,7 @@
         <p:spPr>
           <a:xfrm>
             <a:off x="548640" y="1371600"/>
-            <a:ext cx="5394960" cy="2377440"/>
+            <a:ext cx="5394960" cy="2651760"/>
           </a:xfrm>
           <a:prstGeom prst="rect">
             <a:avLst/>
@@ -5770,23 +5681,21 @@
           <a:ln/>
         </p:spPr>
         <p:txBody>
-          <a:bodyPr wrap="square" lIns="0" tIns="0" rIns="0" bIns="0" rtlCol="0" anchor="t">
-            <a:normAutofit/>
-          </a:bodyPr>
+          <a:bodyPr wrap="square" lIns="0" tIns="0" rIns="0" bIns="0" rtlCol="0" anchor="t"/>
           <a:lstStyle/>
           <a:p>
             <a:pPr indent="0" marL="0">
               <a:buNone/>
             </a:pPr>
             <a:r>
-              <a:rPr lang="en-US" sz="2800" b="1" dirty="0">
+              <a:rPr lang="en-US" sz="2700" b="1" dirty="0">
                 <a:solidFill>
                   <a:srgbClr val="0F2A5F"/>
                 </a:solidFill>
               </a:rPr>
               <a:t>A message along a nerve can travel at over 100 metres per second. The message that makes a child grow taller takes years. Why does the body need two different kinds of messenger?</a:t>
             </a:r>
-            <a:endParaRPr lang="en-US" sz="2800" dirty="0"/>
+            <a:endParaRPr lang="en-US" sz="2700" dirty="0"/>
           </a:p>
         </p:txBody>
       </p:sp>
@@ -5798,8 +5707,8 @@
         </p:nvSpPr>
         <p:spPr>
           <a:xfrm>
-            <a:off x="548640" y="3794760"/>
-            <a:ext cx="5394960" cy="2103120"/>
+            <a:off x="548640" y="4114800"/>
+            <a:ext cx="5394960" cy="1828800"/>
           </a:xfrm>
           <a:prstGeom prst="rect">
             <a:avLst/>
@@ -5808,9 +5717,7 @@
           <a:ln/>
         </p:spPr>
         <p:txBody>
-          <a:bodyPr wrap="square" lIns="0" tIns="0" rIns="0" bIns="0" rtlCol="0" anchor="t">
-            <a:normAutofit/>
-          </a:bodyPr>
+          <a:bodyPr wrap="square" lIns="0" tIns="0" rIns="0" bIns="0" rtlCol="0" anchor="t"/>
           <a:lstStyle/>
           <a:p>
             <a:pPr indent="0" marL="0">
@@ -5820,14 +5727,14 @@
               <a:buNone/>
             </a:pPr>
             <a:r>
-              <a:rPr lang="en-US" sz="1600" dirty="0">
+              <a:rPr lang="en-US" sz="2000" dirty="0">
                 <a:solidFill>
                   <a:srgbClr val="141B26"/>
                 </a:solidFill>
               </a:rPr>
               <a:t>Talk to a partner: name one fast response and one slow change in your body.</a:t>
             </a:r>
-            <a:endParaRPr lang="en-US" sz="1600" dirty="0"/>
+            <a:endParaRPr lang="en-US" sz="2000" dirty="0"/>
           </a:p>
         </p:txBody>
       </p:sp>
@@ -5864,7 +5771,7 @@
         <p:spPr>
           <a:xfrm>
             <a:off x="6309360" y="5532120"/>
-            <a:ext cx="5303520" cy="502920"/>
+            <a:ext cx="5303520" cy="548640"/>
           </a:xfrm>
           <a:prstGeom prst="rect">
             <a:avLst/>
@@ -5880,7 +5787,7 @@
               <a:buNone/>
             </a:pPr>
             <a:r>
-              <a:rPr lang="en-US" sz="1100" dirty="0">
+              <a:rPr lang="en-US" sz="1300" dirty="0">
                 <a:solidFill>
                   <a:srgbClr val="141B26"/>
                 </a:solidFill>
@@ -5890,21 +5797,21 @@
             <a:pPr algn="l" indent="0" marL="0">
               <a:buNone/>
             </a:pPr>
-            <a:endParaRPr lang="en-US" sz="1100" dirty="0"/>
+            <a:endParaRPr lang="en-US" sz="1300" dirty="0"/>
           </a:p>
           <a:p>
             <a:pPr algn="l" indent="0" marL="0">
               <a:buNone/>
             </a:pPr>
             <a:r>
-              <a:rPr lang="en-US" sz="800" dirty="0">
+              <a:rPr lang="en-US" sz="900" dirty="0">
                 <a:solidFill>
                   <a:srgbClr val="5B6574"/>
                 </a:solidFill>
               </a:rPr>
               <a:t>Image: unknown, CC0, via Wikimedia Commons</a:t>
             </a:r>
-            <a:endParaRPr lang="en-US" sz="1100" dirty="0"/>
+            <a:endParaRPr lang="en-US" sz="1300" dirty="0"/>
           </a:p>
         </p:txBody>
       </p:sp>
@@ -6087,8 +5994,8 @@
         </p:nvSpPr>
         <p:spPr>
           <a:xfrm>
-            <a:off x="548640" y="6053328"/>
-            <a:ext cx="9601200" cy="292608"/>
+            <a:off x="548640" y="6035040"/>
+            <a:ext cx="9601200" cy="310896"/>
           </a:xfrm>
           <a:prstGeom prst="rect">
             <a:avLst/>
@@ -6104,7 +6011,7 @@
               <a:buNone/>
             </a:pPr>
             <a:r>
-              <a:rPr lang="en-US" sz="1200" b="1" dirty="0">
+              <a:rPr lang="en-US" sz="1400" b="1" dirty="0">
                 <a:solidFill>
                   <a:srgbClr val="7B3A8E"/>
                 </a:solidFill>
@@ -6115,14 +6022,14 @@
               <a:buNone/>
             </a:pPr>
             <a:r>
-              <a:rPr lang="en-US" sz="1200" dirty="0">
+              <a:rPr lang="en-US" sz="1400" dirty="0">
                 <a:solidFill>
                   <a:srgbClr val="7B3A8E"/>
                 </a:solidFill>
               </a:rPr>
               <a:t>central nervous system   ·   receptor   ·   impulse   ·   effector</a:t>
             </a:r>
-            <a:endParaRPr lang="en-US" sz="1200" dirty="0"/>
+            <a:endParaRPr lang="en-US" sz="1400" dirty="0"/>
           </a:p>
         </p:txBody>
       </p:sp>
@@ -6144,81 +6051,79 @@
           <a:ln/>
         </p:spPr>
         <p:txBody>
-          <a:bodyPr wrap="square" lIns="0" tIns="0" rIns="0" bIns="0" rtlCol="0" anchor="t">
-            <a:normAutofit/>
-          </a:bodyPr>
-          <a:lstStyle/>
-          <a:p>
-            <a:pPr marL="228600" indent="-228600">
+          <a:bodyPr wrap="square" lIns="0" tIns="0" rIns="0" bIns="0" rtlCol="0" anchor="t"/>
+          <a:lstStyle/>
+          <a:p>
+            <a:pPr marL="304800" indent="-304800">
               <a:spcAft>
-                <a:spcPts val="600"/>
+                <a:spcPts val="800"/>
               </a:spcAft>
               <a:buSzPct val="100000"/>
               <a:buChar char="•"/>
             </a:pPr>
             <a:r>
-              <a:rPr lang="en-US" sz="1700" dirty="0">
+              <a:rPr lang="en-US" sz="2000" dirty="0">
                 <a:solidFill>
                   <a:srgbClr val="141B26"/>
                 </a:solidFill>
               </a:rPr>
               <a:t>Organs: the brain and spinal cord (the central nervous system, CNS) and the nerves.</a:t>
             </a:r>
-            <a:endParaRPr lang="en-US" sz="1700" dirty="0"/>
-          </a:p>
-          <a:p>
-            <a:pPr marL="228600" indent="-228600">
+            <a:endParaRPr lang="en-US" sz="2000" dirty="0"/>
+          </a:p>
+          <a:p>
+            <a:pPr marL="304800" indent="-304800">
               <a:spcAft>
-                <a:spcPts val="600"/>
+                <a:spcPts val="800"/>
               </a:spcAft>
               <a:buSzPct val="100000"/>
               <a:buChar char="•"/>
             </a:pPr>
             <a:r>
-              <a:rPr lang="en-US" sz="1700" dirty="0">
+              <a:rPr lang="en-US" sz="2000" dirty="0">
                 <a:solidFill>
                   <a:srgbClr val="141B26"/>
                 </a:solidFill>
               </a:rPr>
               <a:t>Receptor cells in sense organs (eyes, ears, skin) detect stimuli.</a:t>
             </a:r>
-            <a:endParaRPr lang="en-US" sz="1700" dirty="0"/>
-          </a:p>
-          <a:p>
-            <a:pPr marL="228600" indent="-228600">
+            <a:endParaRPr lang="en-US" sz="2000" dirty="0"/>
+          </a:p>
+          <a:p>
+            <a:pPr marL="304800" indent="-304800">
               <a:spcAft>
-                <a:spcPts val="600"/>
+                <a:spcPts val="800"/>
               </a:spcAft>
               <a:buSzPct val="100000"/>
               <a:buChar char="•"/>
             </a:pPr>
             <a:r>
-              <a:rPr lang="en-US" sz="1700" dirty="0">
+              <a:rPr lang="en-US" sz="2000" dirty="0">
                 <a:solidFill>
                   <a:srgbClr val="141B26"/>
                 </a:solidFill>
               </a:rPr>
               <a:t>A receptor produces electrical impulses that travel along nerves to the CNS.</a:t>
             </a:r>
-            <a:endParaRPr lang="en-US" sz="1700" dirty="0"/>
-          </a:p>
-          <a:p>
-            <a:pPr marL="228600" indent="-228600">
+            <a:endParaRPr lang="en-US" sz="2000" dirty="0"/>
+          </a:p>
+          <a:p>
+            <a:pPr marL="304800" indent="-304800">
               <a:spcAft>
-                <a:spcPts val="600"/>
+                <a:spcPts val="800"/>
               </a:spcAft>
               <a:buSzPct val="100000"/>
               <a:buChar char="•"/>
             </a:pPr>
             <a:r>
-              <a:rPr lang="en-US" sz="1700" dirty="0">
+              <a:rPr lang="en-US" sz="2000" dirty="0">
                 <a:solidFill>
                   <a:srgbClr val="141B26"/>
                 </a:solidFill>
               </a:rPr>
               <a:t>The brain processes the information and sends impulses to effectors: muscles contract, glands release substances.</a:t>
             </a:r>
-            <a:endParaRPr lang="en-US" sz="1700" dirty="0"/>
+            <a:endParaRPr lang="en-US" sz="2000" dirty="0"/>
           </a:p>
         </p:txBody>
       </p:sp>
@@ -6265,16 +6170,14 @@
           <a:ln/>
         </p:spPr>
         <p:txBody>
-          <a:bodyPr wrap="square" lIns="0" tIns="0" rIns="0" bIns="0" rtlCol="0" anchor="ctr">
-            <a:normAutofit/>
-          </a:bodyPr>
+          <a:bodyPr wrap="square" lIns="0" tIns="0" rIns="0" bIns="0" rtlCol="0" anchor="ctr"/>
           <a:lstStyle/>
           <a:p>
             <a:pPr indent="0" marL="0">
               <a:buNone/>
             </a:pPr>
             <a:r>
-              <a:rPr lang="en-US" sz="1400" b="1" dirty="0">
+              <a:rPr lang="en-US" sz="1700" b="1" dirty="0">
                 <a:solidFill>
                   <a:srgbClr val="7B3A8E"/>
                 </a:solidFill>
@@ -6285,14 +6188,14 @@
               <a:buNone/>
             </a:pPr>
             <a:r>
-              <a:rPr lang="en-US" sz="1400" dirty="0">
+              <a:rPr lang="en-US" sz="1700" dirty="0">
                 <a:solidFill>
                   <a:srgbClr val="141B26"/>
                 </a:solidFill>
               </a:rPr>
               <a:t>stimulus, receptor, nerve, CNS, nerve, effector, response.</a:t>
             </a:r>
-            <a:endParaRPr lang="en-US" sz="1400" dirty="0"/>
+            <a:endParaRPr lang="en-US" sz="1700" dirty="0"/>
           </a:p>
         </p:txBody>
       </p:sp>
@@ -6492,14 +6395,14 @@
               <a:buNone/>
             </a:pPr>
             <a:r>
-              <a:rPr lang="en-US" sz="1600" dirty="0">
+              <a:rPr lang="en-US" sz="1500" dirty="0">
                 <a:solidFill>
                   <a:srgbClr val="141B26"/>
                 </a:solidFill>
               </a:rPr>
               <a:t>Touch receptors in your fingers detect the pen; impulses travel to the CNS and back out to the muscles that lift your hand.</a:t>
             </a:r>
-            <a:endParaRPr lang="en-US" sz="1600" dirty="0"/>
+            <a:endParaRPr lang="en-US" sz="1500" dirty="0"/>
           </a:p>
         </p:txBody>
       </p:sp>
@@ -6570,16 +6473,14 @@
           <a:ln/>
         </p:spPr>
         <p:txBody>
-          <a:bodyPr wrap="square" lIns="0" tIns="0" rIns="0" bIns="0" rtlCol="0" anchor="ctr">
-            <a:normAutofit/>
-          </a:bodyPr>
+          <a:bodyPr wrap="square" lIns="0" tIns="0" rIns="0" bIns="0" rtlCol="0" anchor="ctr"/>
           <a:lstStyle/>
           <a:p>
             <a:pPr indent="0" marL="0">
               <a:buNone/>
             </a:pPr>
             <a:r>
-              <a:rPr lang="en-US" sz="1400" b="1" dirty="0">
+              <a:rPr lang="en-US" sz="1700" b="1" dirty="0">
                 <a:solidFill>
                   <a:srgbClr val="7B3A8E"/>
                 </a:solidFill>
@@ -6590,14 +6491,14 @@
               <a:buNone/>
             </a:pPr>
             <a:r>
-              <a:rPr lang="en-US" sz="1400" dirty="0">
+              <a:rPr lang="en-US" sz="1700" dirty="0">
                 <a:solidFill>
                   <a:srgbClr val="141B26"/>
                 </a:solidFill>
               </a:rPr>
               <a:t>Impulses are electrical signals. They travel along nerves, usually to the brain via the spinal cord, and back out to an effector.</a:t>
             </a:r>
-            <a:endParaRPr lang="en-US" sz="1400" dirty="0"/>
+            <a:endParaRPr lang="en-US" sz="1700" dirty="0"/>
           </a:p>
         </p:txBody>
       </p:sp>
@@ -6780,8 +6681,8 @@
         </p:nvSpPr>
         <p:spPr>
           <a:xfrm>
-            <a:off x="548640" y="6053328"/>
-            <a:ext cx="9601200" cy="292608"/>
+            <a:off x="548640" y="6035040"/>
+            <a:ext cx="9601200" cy="310896"/>
           </a:xfrm>
           <a:prstGeom prst="rect">
             <a:avLst/>
@@ -6797,7 +6698,7 @@
               <a:buNone/>
             </a:pPr>
             <a:r>
-              <a:rPr lang="en-US" sz="1200" b="1" dirty="0">
+              <a:rPr lang="en-US" sz="1400" b="1" dirty="0">
                 <a:solidFill>
                   <a:srgbClr val="7B3A8E"/>
                 </a:solidFill>
@@ -6808,14 +6709,14 @@
               <a:buNone/>
             </a:pPr>
             <a:r>
-              <a:rPr lang="en-US" sz="1200" dirty="0">
+              <a:rPr lang="en-US" sz="1400" dirty="0">
                 <a:solidFill>
                   <a:srgbClr val="7B3A8E"/>
                 </a:solidFill>
               </a:rPr>
               <a:t>hormone   ·   gland   ·   target organ   ·   insulin</a:t>
             </a:r>
-            <a:endParaRPr lang="en-US" sz="1200" dirty="0"/>
+            <a:endParaRPr lang="en-US" sz="1400" dirty="0"/>
           </a:p>
         </p:txBody>
       </p:sp>
@@ -6837,99 +6738,97 @@
           <a:ln/>
         </p:spPr>
         <p:txBody>
-          <a:bodyPr wrap="square" lIns="0" tIns="0" rIns="0" bIns="0" rtlCol="0" anchor="t">
-            <a:normAutofit/>
-          </a:bodyPr>
-          <a:lstStyle/>
-          <a:p>
-            <a:pPr marL="228600" indent="-228600">
+          <a:bodyPr wrap="square" lIns="0" tIns="0" rIns="0" bIns="0" rtlCol="0" anchor="t"/>
+          <a:lstStyle/>
+          <a:p>
+            <a:pPr marL="304800" indent="-304800">
               <a:spcAft>
-                <a:spcPts val="600"/>
+                <a:spcPts val="800"/>
               </a:spcAft>
               <a:buSzPct val="100000"/>
               <a:buChar char="•"/>
             </a:pPr>
             <a:r>
-              <a:rPr lang="en-US" sz="1700" dirty="0">
+              <a:rPr lang="en-US" sz="2000" dirty="0">
                 <a:solidFill>
                   <a:srgbClr val="141B26"/>
                 </a:solidFill>
               </a:rPr>
               <a:t>Hormones are chemicals made in glands and released into the blood.</a:t>
             </a:r>
-            <a:endParaRPr lang="en-US" sz="1700" dirty="0"/>
-          </a:p>
-          <a:p>
-            <a:pPr marL="228600" indent="-228600">
+            <a:endParaRPr lang="en-US" sz="2000" dirty="0"/>
+          </a:p>
+          <a:p>
+            <a:pPr marL="304800" indent="-304800">
               <a:spcAft>
-                <a:spcPts val="600"/>
+                <a:spcPts val="800"/>
               </a:spcAft>
               <a:buSzPct val="100000"/>
               <a:buChar char="•"/>
             </a:pPr>
             <a:r>
-              <a:rPr lang="en-US" sz="1700" dirty="0">
+              <a:rPr lang="en-US" sz="2000" dirty="0">
                 <a:solidFill>
                   <a:srgbClr val="141B26"/>
                 </a:solidFill>
               </a:rPr>
               <a:t>Target organs respond to a hormone by changing what they do.</a:t>
             </a:r>
-            <a:endParaRPr lang="en-US" sz="1700" dirty="0"/>
-          </a:p>
-          <a:p>
-            <a:pPr marL="228600" indent="-228600">
+            <a:endParaRPr lang="en-US" sz="2000" dirty="0"/>
+          </a:p>
+          <a:p>
+            <a:pPr marL="304800" indent="-304800">
               <a:spcAft>
-                <a:spcPts val="600"/>
+                <a:spcPts val="800"/>
               </a:spcAft>
               <a:buSzPct val="100000"/>
               <a:buChar char="•"/>
             </a:pPr>
             <a:r>
-              <a:rPr lang="en-US" sz="1700" dirty="0">
+              <a:rPr lang="en-US" sz="2000" dirty="0">
                 <a:solidFill>
                   <a:srgbClr val="141B26"/>
                 </a:solidFill>
               </a:rPr>
               <a:t>Adrenaline (adrenal glands) increases heart rate and breathing rate.</a:t>
             </a:r>
-            <a:endParaRPr lang="en-US" sz="1700" dirty="0"/>
-          </a:p>
-          <a:p>
-            <a:pPr marL="228600" indent="-228600">
+            <a:endParaRPr lang="en-US" sz="2000" dirty="0"/>
+          </a:p>
+          <a:p>
+            <a:pPr marL="304800" indent="-304800">
               <a:spcAft>
-                <a:spcPts val="600"/>
+                <a:spcPts val="800"/>
               </a:spcAft>
               <a:buSzPct val="100000"/>
               <a:buChar char="•"/>
             </a:pPr>
             <a:r>
-              <a:rPr lang="en-US" sz="1700" dirty="0">
+              <a:rPr lang="en-US" sz="2000" dirty="0">
                 <a:solidFill>
                   <a:srgbClr val="141B26"/>
                 </a:solidFill>
               </a:rPr>
               <a:t>Insulin (pancreas) makes muscle and liver cells take up glucose from the blood.</a:t>
             </a:r>
-            <a:endParaRPr lang="en-US" sz="1700" dirty="0"/>
-          </a:p>
-          <a:p>
-            <a:pPr marL="228600" indent="-228600">
+            <a:endParaRPr lang="en-US" sz="2000" dirty="0"/>
+          </a:p>
+          <a:p>
+            <a:pPr marL="304800" indent="-304800">
               <a:spcAft>
-                <a:spcPts val="600"/>
+                <a:spcPts val="800"/>
               </a:spcAft>
               <a:buSzPct val="100000"/>
               <a:buChar char="•"/>
             </a:pPr>
             <a:r>
-              <a:rPr lang="en-US" sz="1700" dirty="0">
+              <a:rPr lang="en-US" sz="2000" dirty="0">
                 <a:solidFill>
                   <a:srgbClr val="141B26"/>
                 </a:solidFill>
               </a:rPr>
               <a:t>Growth hormone (pituitary gland) controls growth; thyroxine (thyroid) controls the rate of many body processes.</a:t>
             </a:r>
-            <a:endParaRPr lang="en-US" sz="1700" dirty="0"/>
+            <a:endParaRPr lang="en-US" sz="2000" dirty="0"/>
           </a:p>
         </p:txBody>
       </p:sp>
@@ -6976,16 +6875,14 @@
           <a:ln/>
         </p:spPr>
         <p:txBody>
-          <a:bodyPr wrap="square" lIns="0" tIns="0" rIns="0" bIns="0" rtlCol="0" anchor="ctr">
-            <a:normAutofit/>
-          </a:bodyPr>
+          <a:bodyPr wrap="square" lIns="0" tIns="0" rIns="0" bIns="0" rtlCol="0" anchor="ctr"/>
           <a:lstStyle/>
           <a:p>
             <a:pPr indent="0" marL="0">
               <a:buNone/>
             </a:pPr>
             <a:r>
-              <a:rPr lang="en-US" sz="1400" b="1" dirty="0">
+              <a:rPr lang="en-US" sz="1700" b="1" dirty="0">
                 <a:solidFill>
                   <a:srgbClr val="7B3A8E"/>
                 </a:solidFill>
@@ -6996,14 +6893,14 @@
               <a:buNone/>
             </a:pPr>
             <a:r>
-              <a:rPr lang="en-US" sz="1400" dirty="0">
+              <a:rPr lang="en-US" sz="1700" dirty="0">
                 <a:solidFill>
                   <a:srgbClr val="141B26"/>
                 </a:solidFill>
               </a:rPr>
               <a:t>Hormones travel in the blood and act on target organs.</a:t>
             </a:r>
-            <a:endParaRPr lang="en-US" sz="1400" dirty="0"/>
+            <a:endParaRPr lang="en-US" sz="1700" dirty="0"/>
           </a:p>
         </p:txBody>
       </p:sp>
@@ -7214,7 +7111,7 @@
                       <a:pPr indent="0" marL="0">
                         <a:buNone/>
                       </a:pPr>
-                      <a:endParaRPr lang="en-US" sz="1300" dirty="0">
+                      <a:endParaRPr lang="en-US" sz="1500" dirty="0">
                         <a:latin typeface="Calibri" charset="0"/>
                         <a:ea typeface="Calibri" charset="0"/>
                         <a:cs typeface="Calibri" charset="0"/>
@@ -7272,7 +7169,7 @@
                         <a:buNone/>
                       </a:pPr>
                       <a:r>
-                        <a:rPr lang="en-US" sz="1300" b="1" dirty="0">
+                        <a:rPr lang="en-US" sz="1500" b="1" dirty="0">
                           <a:solidFill>
                             <a:srgbClr val="FFFFFF"/>
                           </a:solidFill>
@@ -7282,7 +7179,7 @@
                         </a:rPr>
                         <a:t>Nervous system</a:t>
                       </a:r>
-                      <a:endParaRPr lang="en-US" sz="1300" dirty="0">
+                      <a:endParaRPr lang="en-US" sz="1500" dirty="0">
                         <a:latin typeface="Calibri" charset="0"/>
                         <a:ea typeface="Calibri" charset="0"/>
                         <a:cs typeface="Calibri" charset="0"/>
@@ -7340,7 +7237,7 @@
                         <a:buNone/>
                       </a:pPr>
                       <a:r>
-                        <a:rPr lang="en-US" sz="1300" b="1" dirty="0">
+                        <a:rPr lang="en-US" sz="1500" b="1" dirty="0">
                           <a:solidFill>
                             <a:srgbClr val="FFFFFF"/>
                           </a:solidFill>
@@ -7350,7 +7247,7 @@
                         </a:rPr>
                         <a:t>Hormonal system</a:t>
                       </a:r>
-                      <a:endParaRPr lang="en-US" sz="1300" dirty="0">
+                      <a:endParaRPr lang="en-US" sz="1500" dirty="0">
                         <a:latin typeface="Calibri" charset="0"/>
                         <a:ea typeface="Calibri" charset="0"/>
                         <a:cs typeface="Calibri" charset="0"/>
@@ -7410,7 +7307,7 @@
                         <a:buNone/>
                       </a:pPr>
                       <a:r>
-                        <a:rPr lang="en-US" sz="1300" dirty="0">
+                        <a:rPr lang="en-US" sz="1500" dirty="0">
                           <a:solidFill>
                             <a:srgbClr val="141B26"/>
                           </a:solidFill>
@@ -7420,7 +7317,7 @@
                         </a:rPr>
                         <a:t>messenger</a:t>
                       </a:r>
-                      <a:endParaRPr lang="en-US" sz="1300" dirty="0">
+                      <a:endParaRPr lang="en-US" sz="1500" dirty="0">
                         <a:latin typeface="Calibri" charset="0"/>
                         <a:ea typeface="Calibri" charset="0"/>
                         <a:cs typeface="Calibri" charset="0"/>
@@ -7475,7 +7372,7 @@
                         <a:buNone/>
                       </a:pPr>
                       <a:r>
-                        <a:rPr lang="en-US" sz="1300" dirty="0">
+                        <a:rPr lang="en-US" sz="1500" dirty="0">
                           <a:solidFill>
                             <a:srgbClr val="141B26"/>
                           </a:solidFill>
@@ -7485,7 +7382,7 @@
                         </a:rPr>
                         <a:t>electrical impulses along nerves</a:t>
                       </a:r>
-                      <a:endParaRPr lang="en-US" sz="1300" dirty="0">
+                      <a:endParaRPr lang="en-US" sz="1500" dirty="0">
                         <a:latin typeface="Calibri" charset="0"/>
                         <a:ea typeface="Calibri" charset="0"/>
                         <a:cs typeface="Calibri" charset="0"/>
@@ -7540,7 +7437,7 @@
                         <a:buNone/>
                       </a:pPr>
                       <a:r>
-                        <a:rPr lang="en-US" sz="1300" dirty="0">
+                        <a:rPr lang="en-US" sz="1500" dirty="0">
                           <a:solidFill>
                             <a:srgbClr val="141B26"/>
                           </a:solidFill>
@@ -7550,7 +7447,7 @@
                         </a:rPr>
                         <a:t>chemical messengers (hormones) in the blood</a:t>
                       </a:r>
-                      <a:endParaRPr lang="en-US" sz="1300" dirty="0">
+                      <a:endParaRPr lang="en-US" sz="1500" dirty="0">
                         <a:latin typeface="Calibri" charset="0"/>
                         <a:ea typeface="Calibri" charset="0"/>
                         <a:cs typeface="Calibri" charset="0"/>
@@ -7607,7 +7504,7 @@
                         <a:buNone/>
                       </a:pPr>
                       <a:r>
-                        <a:rPr lang="en-US" sz="1300" dirty="0">
+                        <a:rPr lang="en-US" sz="1500" dirty="0">
                           <a:solidFill>
                             <a:srgbClr val="141B26"/>
                           </a:solidFill>
@@ -7617,7 +7514,7 @@
                         </a:rPr>
                         <a:t>speed</a:t>
                       </a:r>
-                      <a:endParaRPr lang="en-US" sz="1300" dirty="0">
+                      <a:endParaRPr lang="en-US" sz="1500" dirty="0">
                         <a:latin typeface="Calibri" charset="0"/>
                         <a:ea typeface="Calibri" charset="0"/>
                         <a:cs typeface="Calibri" charset="0"/>
@@ -7672,7 +7569,7 @@
                         <a:buNone/>
                       </a:pPr>
                       <a:r>
-                        <a:rPr lang="en-US" sz="1300" dirty="0">
+                        <a:rPr lang="en-US" sz="1500" dirty="0">
                           <a:solidFill>
                             <a:srgbClr val="141B26"/>
                           </a:solidFill>
@@ -7682,7 +7579,7 @@
                         </a:rPr>
                         <a:t>short, rapid response</a:t>
                       </a:r>
-                      <a:endParaRPr lang="en-US" sz="1300" dirty="0">
+                      <a:endParaRPr lang="en-US" sz="1500" dirty="0">
                         <a:latin typeface="Calibri" charset="0"/>
                         <a:ea typeface="Calibri" charset="0"/>
                         <a:cs typeface="Calibri" charset="0"/>
@@ -7737,7 +7634,7 @@
                         <a:buNone/>
                       </a:pPr>
                       <a:r>
-                        <a:rPr lang="en-US" sz="1300" dirty="0">
+                        <a:rPr lang="en-US" sz="1500" dirty="0">
                           <a:solidFill>
                             <a:srgbClr val="141B26"/>
                           </a:solidFill>
@@ -7747,7 +7644,7 @@
                         </a:rPr>
                         <a:t>longer, slower response</a:t>
                       </a:r>
-                      <a:endParaRPr lang="en-US" sz="1300" dirty="0">
+                      <a:endParaRPr lang="en-US" sz="1500" dirty="0">
                         <a:latin typeface="Calibri" charset="0"/>
                         <a:ea typeface="Calibri" charset="0"/>
                         <a:cs typeface="Calibri" charset="0"/>
@@ -7804,7 +7701,7 @@
                         <a:buNone/>
                       </a:pPr>
                       <a:r>
-                        <a:rPr lang="en-US" sz="1300" dirty="0">
+                        <a:rPr lang="en-US" sz="1500" dirty="0">
                           <a:solidFill>
                             <a:srgbClr val="141B26"/>
                           </a:solidFill>
@@ -7814,7 +7711,7 @@
                         </a:rPr>
                         <a:t>acts on</a:t>
                       </a:r>
-                      <a:endParaRPr lang="en-US" sz="1300" dirty="0">
+                      <a:endParaRPr lang="en-US" sz="1500" dirty="0">
                         <a:latin typeface="Calibri" charset="0"/>
                         <a:ea typeface="Calibri" charset="0"/>
                         <a:cs typeface="Calibri" charset="0"/>
@@ -7869,7 +7766,7 @@
                         <a:buNone/>
                       </a:pPr>
                       <a:r>
-                        <a:rPr lang="en-US" sz="1300" dirty="0">
+                        <a:rPr lang="en-US" sz="1500" dirty="0">
                           <a:solidFill>
                             <a:srgbClr val="141B26"/>
                           </a:solidFill>
@@ -7879,7 +7776,7 @@
                         </a:rPr>
                         <a:t>only the effector connected to the nerve</a:t>
                       </a:r>
-                      <a:endParaRPr lang="en-US" sz="1300" dirty="0">
+                      <a:endParaRPr lang="en-US" sz="1500" dirty="0">
                         <a:latin typeface="Calibri" charset="0"/>
                         <a:ea typeface="Calibri" charset="0"/>
                         <a:cs typeface="Calibri" charset="0"/>
@@ -7934,7 +7831,7 @@
                         <a:buNone/>
                       </a:pPr>
                       <a:r>
-                        <a:rPr lang="en-US" sz="1300" dirty="0">
+                        <a:rPr lang="en-US" sz="1500" dirty="0">
                           <a:solidFill>
                             <a:srgbClr val="141B26"/>
                           </a:solidFill>
@@ -7944,7 +7841,7 @@
                         </a:rPr>
                         <a:t>many target organs at the same time</a:t>
                       </a:r>
-                      <a:endParaRPr lang="en-US" sz="1300" dirty="0">
+                      <a:endParaRPr lang="en-US" sz="1500" dirty="0">
                         <a:latin typeface="Calibri" charset="0"/>
                         <a:ea typeface="Calibri" charset="0"/>
                         <a:cs typeface="Calibri" charset="0"/>
@@ -8001,7 +7898,7 @@
                         <a:buNone/>
                       </a:pPr>
                       <a:r>
-                        <a:rPr lang="en-US" sz="1300" dirty="0">
+                        <a:rPr lang="en-US" sz="1500" dirty="0">
                           <a:solidFill>
                             <a:srgbClr val="141B26"/>
                           </a:solidFill>
@@ -8011,7 +7908,7 @@
                         </a:rPr>
                         <a:t>example</a:t>
                       </a:r>
-                      <a:endParaRPr lang="en-US" sz="1300" dirty="0">
+                      <a:endParaRPr lang="en-US" sz="1500" dirty="0">
                         <a:latin typeface="Calibri" charset="0"/>
                         <a:ea typeface="Calibri" charset="0"/>
                         <a:cs typeface="Calibri" charset="0"/>
@@ -8066,7 +7963,7 @@
                         <a:buNone/>
                       </a:pPr>
                       <a:r>
-                        <a:rPr lang="en-US" sz="1300" dirty="0">
+                        <a:rPr lang="en-US" sz="1500" dirty="0">
                           <a:solidFill>
                             <a:srgbClr val="141B26"/>
                           </a:solidFill>
@@ -8076,7 +7973,7 @@
                         </a:rPr>
                         <a:t>pulling your hand from a hot pan</a:t>
                       </a:r>
-                      <a:endParaRPr lang="en-US" sz="1300" dirty="0">
+                      <a:endParaRPr lang="en-US" sz="1500" dirty="0">
                         <a:latin typeface="Calibri" charset="0"/>
                         <a:ea typeface="Calibri" charset="0"/>
                         <a:cs typeface="Calibri" charset="0"/>
@@ -8131,7 +8028,7 @@
                         <a:buNone/>
                       </a:pPr>
                       <a:r>
-                        <a:rPr lang="en-US" sz="1300" dirty="0">
+                        <a:rPr lang="en-US" sz="1500" dirty="0">
                           <a:solidFill>
                             <a:srgbClr val="141B26"/>
                           </a:solidFill>
@@ -8141,7 +8038,7 @@
                         </a:rPr>
                         <a:t>adrenaline preparing the body for danger</a:t>
                       </a:r>
-                      <a:endParaRPr lang="en-US" sz="1300" dirty="0">
+                      <a:endParaRPr lang="en-US" sz="1500" dirty="0">
                         <a:latin typeface="Calibri" charset="0"/>
                         <a:ea typeface="Calibri" charset="0"/>
                         <a:cs typeface="Calibri" charset="0"/>
@@ -8210,63 +8107,61 @@
           <a:ln/>
         </p:spPr>
         <p:txBody>
-          <a:bodyPr wrap="square" lIns="0" tIns="0" rIns="0" bIns="0" rtlCol="0" anchor="t">
-            <a:normAutofit/>
-          </a:bodyPr>
-          <a:lstStyle/>
-          <a:p>
-            <a:pPr marL="228600" indent="-228600">
+          <a:bodyPr wrap="square" lIns="0" tIns="0" rIns="0" bIns="0" rtlCol="0" anchor="t"/>
+          <a:lstStyle/>
+          <a:p>
+            <a:pPr marL="304800" indent="-304800">
               <a:spcAft>
-                <a:spcPts val="600"/>
+                <a:spcPts val="800"/>
               </a:spcAft>
               <a:buSzPct val="100000"/>
               <a:buChar char="•"/>
             </a:pPr>
             <a:r>
-              <a:rPr lang="en-US" sz="1500" dirty="0">
+              <a:rPr lang="en-US" sz="1800" dirty="0">
                 <a:solidFill>
                   <a:srgbClr val="141B26"/>
                 </a:solidFill>
               </a:rPr>
               <a:t>Nerves: fast and local.</a:t>
             </a:r>
-            <a:endParaRPr lang="en-US" sz="1500" dirty="0"/>
-          </a:p>
-          <a:p>
-            <a:pPr marL="228600" indent="-228600">
+            <a:endParaRPr lang="en-US" sz="1800" dirty="0"/>
+          </a:p>
+          <a:p>
+            <a:pPr marL="304800" indent="-304800">
               <a:spcAft>
-                <a:spcPts val="600"/>
+                <a:spcPts val="800"/>
               </a:spcAft>
               <a:buSzPct val="100000"/>
               <a:buChar char="•"/>
             </a:pPr>
             <a:r>
-              <a:rPr lang="en-US" sz="1500" dirty="0">
+              <a:rPr lang="en-US" sz="1800" dirty="0">
                 <a:solidFill>
                   <a:srgbClr val="141B26"/>
                 </a:solidFill>
               </a:rPr>
               <a:t>Hormones: slower, longer lasting and widespread.</a:t>
             </a:r>
-            <a:endParaRPr lang="en-US" sz="1500" dirty="0"/>
-          </a:p>
-          <a:p>
-            <a:pPr marL="228600" indent="-228600">
+            <a:endParaRPr lang="en-US" sz="1800" dirty="0"/>
+          </a:p>
+          <a:p>
+            <a:pPr marL="304800" indent="-304800">
               <a:spcAft>
-                <a:spcPts val="600"/>
+                <a:spcPts val="800"/>
               </a:spcAft>
               <a:buSzPct val="100000"/>
               <a:buChar char="•"/>
             </a:pPr>
             <a:r>
-              <a:rPr lang="en-US" sz="1500" dirty="0">
+              <a:rPr lang="en-US" sz="1800" dirty="0">
                 <a:solidFill>
                   <a:srgbClr val="141B26"/>
                 </a:solidFill>
               </a:rPr>
               <a:t>Having both means we can respond in different ways to different stimuli.</a:t>
             </a:r>
-            <a:endParaRPr lang="en-US" sz="1500" dirty="0"/>
+            <a:endParaRPr lang="en-US" sz="1800" dirty="0"/>
           </a:p>
         </p:txBody>
       </p:sp>
@@ -8313,16 +8208,14 @@
           <a:ln/>
         </p:spPr>
         <p:txBody>
-          <a:bodyPr wrap="square" lIns="0" tIns="0" rIns="0" bIns="0" rtlCol="0" anchor="ctr">
-            <a:normAutofit/>
-          </a:bodyPr>
+          <a:bodyPr wrap="square" lIns="0" tIns="0" rIns="0" bIns="0" rtlCol="0" anchor="ctr"/>
           <a:lstStyle/>
           <a:p>
             <a:pPr indent="0" marL="0">
               <a:buNone/>
             </a:pPr>
             <a:r>
-              <a:rPr lang="en-US" sz="1400" b="1" dirty="0">
+              <a:rPr lang="en-US" sz="1700" b="1" dirty="0">
                 <a:solidFill>
                   <a:srgbClr val="7B3A8E"/>
                 </a:solidFill>
@@ -8333,14 +8226,14 @@
               <a:buNone/>
             </a:pPr>
             <a:r>
-              <a:rPr lang="en-US" sz="1400" dirty="0">
+              <a:rPr lang="en-US" sz="1700" dirty="0">
                 <a:solidFill>
                   <a:srgbClr val="141B26"/>
                 </a:solidFill>
               </a:rPr>
               <a:t>Two control systems let the body respond in different ways.</a:t>
             </a:r>
-            <a:endParaRPr lang="en-US" sz="1400" dirty="0"/>
+            <a:endParaRPr lang="en-US" sz="1700" dirty="0"/>
           </a:p>
         </p:txBody>
       </p:sp>
@@ -8540,14 +8433,14 @@
               <a:buNone/>
             </a:pPr>
             <a:r>
-              <a:rPr lang="en-US" sz="1400" i="1" dirty="0">
+              <a:rPr lang="en-US" sz="1600" i="1" dirty="0">
                 <a:solidFill>
                   <a:srgbClr val="5B6574"/>
                 </a:solidFill>
               </a:rPr>
               <a:t>Mini whiteboards. One answer each, then we check.</a:t>
             </a:r>
-            <a:endParaRPr lang="en-US" sz="1400" dirty="0"/>
+            <a:endParaRPr lang="en-US" sz="1600" dirty="0"/>
           </a:p>
         </p:txBody>
       </p:sp>
@@ -8596,16 +8489,14 @@
           <a:ln/>
         </p:spPr>
         <p:txBody>
-          <a:bodyPr wrap="square" lIns="0" tIns="0" rIns="0" bIns="0" rtlCol="0" anchor="ctr">
-            <a:normAutofit/>
-          </a:bodyPr>
+          <a:bodyPr wrap="square" lIns="0" tIns="0" rIns="0" bIns="0" rtlCol="0" anchor="ctr"/>
           <a:lstStyle/>
           <a:p>
             <a:pPr indent="0" marL="0">
               <a:buNone/>
             </a:pPr>
             <a:r>
-              <a:rPr lang="en-US" sz="1600" b="1" dirty="0">
+              <a:rPr lang="en-US" sz="2000" b="1" dirty="0">
                 <a:solidFill>
                   <a:srgbClr val="7B3A8E"/>
                 </a:solidFill>
@@ -8616,14 +8507,14 @@
               <a:buNone/>
             </a:pPr>
             <a:r>
-              <a:rPr lang="en-US" sz="1600" dirty="0">
+              <a:rPr lang="en-US" sz="2000" dirty="0">
                 <a:solidFill>
                   <a:srgbClr val="141B26"/>
                 </a:solidFill>
               </a:rPr>
               <a:t>Which sense organ detects light?</a:t>
             </a:r>
-            <a:endParaRPr lang="en-US" sz="1600" dirty="0"/>
+            <a:endParaRPr lang="en-US" sz="2000" dirty="0"/>
           </a:p>
         </p:txBody>
       </p:sp>
@@ -8672,16 +8563,14 @@
           <a:ln/>
         </p:spPr>
         <p:txBody>
-          <a:bodyPr wrap="square" lIns="0" tIns="0" rIns="0" bIns="0" rtlCol="0" anchor="ctr">
-            <a:normAutofit/>
-          </a:bodyPr>
+          <a:bodyPr wrap="square" lIns="0" tIns="0" rIns="0" bIns="0" rtlCol="0" anchor="ctr"/>
           <a:lstStyle/>
           <a:p>
             <a:pPr indent="0" marL="0">
               <a:buNone/>
             </a:pPr>
             <a:r>
-              <a:rPr lang="en-US" sz="1600" b="1" dirty="0">
+              <a:rPr lang="en-US" sz="2000" b="1" dirty="0">
                 <a:solidFill>
                   <a:srgbClr val="7B3A8E"/>
                 </a:solidFill>
@@ -8692,14 +8581,14 @@
               <a:buNone/>
             </a:pPr>
             <a:r>
-              <a:rPr lang="en-US" sz="1600" dirty="0">
+              <a:rPr lang="en-US" sz="2000" dirty="0">
                 <a:solidFill>
                   <a:srgbClr val="141B26"/>
                 </a:solidFill>
               </a:rPr>
               <a:t>Name the two organs of the central nervous system.</a:t>
             </a:r>
-            <a:endParaRPr lang="en-US" sz="1600" dirty="0"/>
+            <a:endParaRPr lang="en-US" sz="2000" dirty="0"/>
           </a:p>
         </p:txBody>
       </p:sp>
@@ -8748,16 +8637,14 @@
           <a:ln/>
         </p:spPr>
         <p:txBody>
-          <a:bodyPr wrap="square" lIns="0" tIns="0" rIns="0" bIns="0" rtlCol="0" anchor="ctr">
-            <a:normAutofit/>
-          </a:bodyPr>
+          <a:bodyPr wrap="square" lIns="0" tIns="0" rIns="0" bIns="0" rtlCol="0" anchor="ctr"/>
           <a:lstStyle/>
           <a:p>
             <a:pPr indent="0" marL="0">
               <a:buNone/>
             </a:pPr>
             <a:r>
-              <a:rPr lang="en-US" sz="1600" b="1" dirty="0">
+              <a:rPr lang="en-US" sz="2000" b="1" dirty="0">
                 <a:solidFill>
                   <a:srgbClr val="7B3A8E"/>
                 </a:solidFill>
@@ -8768,14 +8655,14 @@
               <a:buNone/>
             </a:pPr>
             <a:r>
-              <a:rPr lang="en-US" sz="1600" dirty="0">
+              <a:rPr lang="en-US" sz="2000" dirty="0">
                 <a:solidFill>
                   <a:srgbClr val="141B26"/>
                 </a:solidFill>
               </a:rPr>
               <a:t>Where are hormones made?</a:t>
             </a:r>
-            <a:endParaRPr lang="en-US" sz="1600" dirty="0"/>
+            <a:endParaRPr lang="en-US" sz="2000" dirty="0"/>
           </a:p>
         </p:txBody>
       </p:sp>
@@ -8824,16 +8711,14 @@
           <a:ln/>
         </p:spPr>
         <p:txBody>
-          <a:bodyPr wrap="square" lIns="0" tIns="0" rIns="0" bIns="0" rtlCol="0" anchor="ctr">
-            <a:normAutofit/>
-          </a:bodyPr>
+          <a:bodyPr wrap="square" lIns="0" tIns="0" rIns="0" bIns="0" rtlCol="0" anchor="ctr"/>
           <a:lstStyle/>
           <a:p>
             <a:pPr indent="0" marL="0">
               <a:buNone/>
             </a:pPr>
             <a:r>
-              <a:rPr lang="en-US" sz="1600" b="1" dirty="0">
+              <a:rPr lang="en-US" sz="2000" b="1" dirty="0">
                 <a:solidFill>
                   <a:srgbClr val="7B3A8E"/>
                 </a:solidFill>
@@ -8844,14 +8729,14 @@
               <a:buNone/>
             </a:pPr>
             <a:r>
-              <a:rPr lang="en-US" sz="1600" dirty="0">
+              <a:rPr lang="en-US" sz="2000" dirty="0">
                 <a:solidFill>
                   <a:srgbClr val="141B26"/>
                 </a:solidFill>
               </a:rPr>
               <a:t>Which hormone makes cells take up glucose from the blood?</a:t>
             </a:r>
-            <a:endParaRPr lang="en-US" sz="1600" dirty="0"/>
+            <a:endParaRPr lang="en-US" sz="2000" dirty="0"/>
           </a:p>
         </p:txBody>
       </p:sp>
@@ -8900,16 +8785,14 @@
           <a:ln/>
         </p:spPr>
         <p:txBody>
-          <a:bodyPr wrap="square" lIns="0" tIns="0" rIns="0" bIns="0" rtlCol="0" anchor="ctr">
-            <a:normAutofit/>
-          </a:bodyPr>
+          <a:bodyPr wrap="square" lIns="0" tIns="0" rIns="0" bIns="0" rtlCol="0" anchor="ctr"/>
           <a:lstStyle/>
           <a:p>
             <a:pPr indent="0" marL="0">
               <a:buNone/>
             </a:pPr>
             <a:r>
-              <a:rPr lang="en-US" sz="1600" b="1" dirty="0">
+              <a:rPr lang="en-US" sz="2000" b="1" dirty="0">
                 <a:solidFill>
                   <a:srgbClr val="7B3A8E"/>
                 </a:solidFill>
@@ -8920,14 +8803,14 @@
               <a:buNone/>
             </a:pPr>
             <a:r>
-              <a:rPr lang="en-US" sz="1600" dirty="0">
+              <a:rPr lang="en-US" sz="2000" dirty="0">
                 <a:solidFill>
                   <a:srgbClr val="141B26"/>
                 </a:solidFill>
               </a:rPr>
               <a:t>Which system gives the faster response: nervous or hormonal?</a:t>
             </a:r>
-            <a:endParaRPr lang="en-US" sz="1600" dirty="0"/>
+            <a:endParaRPr lang="en-US" sz="2000" dirty="0"/>
           </a:p>
         </p:txBody>
       </p:sp>
